--- a/docs/pptx/Ch8_P4a_LinkedList_HashMap.pptx
+++ b/docs/pptx/Ch8_P4a_LinkedList_HashMap.pptx
@@ -506,7 +506,11 @@
           <a:p>
             <a:r>
               <a:rPr lang="en-US" dirty="0"/>
-              <a:t/>
+              <a:t>TITRE: LinkedList &amp; HashMap
+Implémentation Java
+Critère: Critère P4 — Implémenter un ADT complexe
+Objectif de cette présentation : couvrir les concepts clés pour le critère Critère P4 — Implémenter un ADT complexe.
+Durée estimée : 1h30 à 2h avec exercices.</a:t>
             </a:r>
             <a:endParaRPr lang="en-US" dirty="0"/>
           </a:p>
@@ -594,7 +598,9 @@
           <a:p>
             <a:r>
               <a:rPr lang="en-US" dirty="0"/>
-              <a:t/>
+              <a:t>PROF: Dessiner au tableau les 3 types de listes chaînées.
+Faire l'analogie : LinkedList = train (wagons reliés). ArrayList = bus (places numérotées).
+Exercice : implémenter une méthode ajouterDebut() dans une classe MaListe avec des nœuds.</a:t>
             </a:r>
             <a:endParaRPr lang="en-US" dirty="0"/>
           </a:p>
@@ -682,7 +688,12 @@
           <a:p>
             <a:r>
               <a:rPr lang="en-US" dirty="0"/>
-              <a:t/>
+              <a:t>PROF: Expliquer le hashing étape par étape :
+1. clé 'Alice' → hashCode() = 65776431
+2. 65776431 % 16 = 7 → bucket[7]
+3. Stocker ('Alice', données) dans bucket[7]
+Question : 'Que se passe-t-il si 2 clés tombent dans le même bucket ?'
+Exercice : simuler un HashMap de 4 buckets à la main.</a:t>
             </a:r>
             <a:endParaRPr lang="en-US" dirty="0"/>
           </a:p>
@@ -770,7 +781,9 @@
           <a:p>
             <a:r>
               <a:rPr lang="en-US" dirty="0"/>
-              <a:t/>
+              <a:t>PROF: Tableau comparatif au tableau.
+Demander aux étudiants : 'Pour un répertoire téléphonique consulté souvent, quelle structure ?' → ArrayList ou HashMap.
+'Pour une file d'attente où on ajoute/retire souvent ?' → LinkedList ou ArrayDeque.</a:t>
             </a:r>
             <a:endParaRPr lang="en-US" dirty="0"/>
           </a:p>
@@ -858,7 +871,8 @@
           <a:p>
             <a:r>
               <a:rPr lang="en-US" dirty="0"/>
-              <a:t/>
+              <a:t>PROF: Devoir P4 : implémenter une classe GestionContacts utilisant LinkedList pour le stockage et fournissant : ajouter, rechercher, supprimer, afficher.
+Site : unite19-gamifie.vercel.app → Monde 3 → Ch8.</a:t>
             </a:r>
             <a:endParaRPr lang="en-US" dirty="0"/>
           </a:p>
@@ -1213,7 +1227,7 @@
     <p:bg>
       <p:bgPr>
         <a:solidFill>
-          <a:srgbClr val="1B2A4A"/>
+          <a:srgbClr val="1A0D00"/>
         </a:solidFill>
       </p:bgPr>
     </p:bg>
@@ -1240,200 +1254,7 @@
         <p:spPr>
           <a:xfrm>
             <a:off x="0" y="0"/>
-            <a:ext cx="9144000" cy="1097280"/>
-          </a:xfrm>
-          <a:prstGeom prst="rect">
-            <a:avLst/>
-          </a:prstGeom>
-          <a:solidFill>
-            <a:srgbClr val="065A82"/>
-          </a:solidFill>
-          <a:ln/>
-        </p:spPr>
-      </p:sp>
-      <p:sp>
-        <p:nvSpPr>
-          <p:cNvPr id="3" name="Text 1"/>
-          <p:cNvSpPr/>
-          <p:nvPr/>
-        </p:nvSpPr>
-        <p:spPr>
-          <a:xfrm>
-            <a:off x="731520" y="137160"/>
-            <a:ext cx="2743200" cy="365760"/>
-          </a:xfrm>
-          <a:prstGeom prst="rect">
-            <a:avLst/>
-          </a:prstGeom>
-          <a:noFill/>
-          <a:ln/>
-        </p:spPr>
-        <p:txBody>
-          <a:bodyPr wrap="square" rtlCol="0" anchor="ctr"/>
-          <a:lstStyle/>
-          <a:p>
-            <a:pPr indent="0" marL="0">
-              <a:buNone/>
-            </a:pPr>
-            <a:r>
-              <a:rPr lang="en-US" sz="1400" b="1" dirty="0">
-                <a:solidFill>
-                  <a:srgbClr val="00A896"/>
-                </a:solidFill>
-                <a:latin typeface="Calibri" pitchFamily="34" charset="0"/>
-                <a:ea typeface="Calibri" pitchFamily="34" charset="-122"/>
-                <a:cs typeface="Calibri" pitchFamily="34" charset="-120"/>
-              </a:rPr>
-              <a:t>MONDE 3</a:t>
-            </a:r>
-            <a:endParaRPr lang="en-US" sz="1400" dirty="0"/>
-          </a:p>
-        </p:txBody>
-      </p:sp>
-      <p:sp>
-        <p:nvSpPr>
-          <p:cNvPr id="4" name="Text 2"/>
-          <p:cNvSpPr/>
-          <p:nvPr/>
-        </p:nvSpPr>
-        <p:spPr>
-          <a:xfrm>
-            <a:off x="731520" y="457200"/>
-            <a:ext cx="7315200" cy="457200"/>
-          </a:xfrm>
-          <a:prstGeom prst="rect">
-            <a:avLst/>
-          </a:prstGeom>
-          <a:noFill/>
-          <a:ln/>
-        </p:spPr>
-        <p:txBody>
-          <a:bodyPr wrap="square" rtlCol="0" anchor="ctr"/>
-          <a:lstStyle/>
-          <a:p>
-            <a:pPr indent="0" marL="0">
-              <a:buNone/>
-            </a:pPr>
-            <a:r>
-              <a:rPr lang="en-US" sz="1200" dirty="0">
-                <a:solidFill>
-                  <a:srgbClr val="E2E8F0"/>
-                </a:solidFill>
-                <a:latin typeface="Calibri" pitchFamily="34" charset="0"/>
-                <a:ea typeface="Calibri" pitchFamily="34" charset="-122"/>
-                <a:cs typeface="Calibri" pitchFamily="34" charset="-120"/>
-              </a:rPr>
-              <a:t>UNIT 19 : Data Structures &amp; Algorithms</a:t>
-            </a:r>
-            <a:endParaRPr lang="en-US" sz="1200" dirty="0"/>
-          </a:p>
-        </p:txBody>
-      </p:sp>
-      <p:sp>
-        <p:nvSpPr>
-          <p:cNvPr id="5" name="Text 3"/>
-          <p:cNvSpPr/>
-          <p:nvPr/>
-        </p:nvSpPr>
-        <p:spPr>
-          <a:xfrm>
-            <a:off x="731520" y="1645920"/>
-            <a:ext cx="7315200" cy="640080"/>
-          </a:xfrm>
-          <a:prstGeom prst="rect">
-            <a:avLst/>
-          </a:prstGeom>
-          <a:noFill/>
-          <a:ln/>
-        </p:spPr>
-        <p:txBody>
-          <a:bodyPr wrap="square" rtlCol="0" anchor="ctr"/>
-          <a:lstStyle/>
-          <a:p>
-            <a:pPr indent="0" marL="0">
-              <a:buNone/>
-            </a:pPr>
-            <a:r>
-              <a:rPr lang="en-US" sz="4400" b="1" dirty="0">
-                <a:solidFill>
-                  <a:srgbClr val="FFFFFF"/>
-                </a:solidFill>
-                <a:latin typeface="Trebuchet MS" pitchFamily="34" charset="0"/>
-                <a:ea typeface="Trebuchet MS" pitchFamily="34" charset="-122"/>
-                <a:cs typeface="Trebuchet MS" pitchFamily="34" charset="-120"/>
-              </a:rPr>
-              <a:t>Chapitre 8</a:t>
-            </a:r>
-            <a:endParaRPr lang="en-US" sz="4400" dirty="0"/>
-          </a:p>
-        </p:txBody>
-      </p:sp>
-      <p:sp>
-        <p:nvSpPr>
-          <p:cNvPr id="6" name="Text 4"/>
-          <p:cNvSpPr/>
-          <p:nvPr/>
-        </p:nvSpPr>
-        <p:spPr>
-          <a:xfrm>
-            <a:off x="731520" y="2286000"/>
-            <a:ext cx="7315200" cy="1097280"/>
-          </a:xfrm>
-          <a:prstGeom prst="rect">
-            <a:avLst/>
-          </a:prstGeom>
-          <a:noFill/>
-          <a:ln/>
-        </p:spPr>
-        <p:txBody>
-          <a:bodyPr wrap="square" rtlCol="0" anchor="ctr"/>
-          <a:lstStyle/>
-          <a:p>
-            <a:pPr indent="0" marL="0">
-              <a:buNone/>
-            </a:pPr>
-            <a:r>
-              <a:rPr lang="en-US" sz="3000" b="1" dirty="0">
-                <a:solidFill>
-                  <a:srgbClr val="00A896"/>
-                </a:solidFill>
-                <a:latin typeface="Trebuchet MS" pitchFamily="34" charset="0"/>
-                <a:ea typeface="Trebuchet MS" pitchFamily="34" charset="-122"/>
-                <a:cs typeface="Trebuchet MS" pitchFamily="34" charset="-120"/>
-              </a:rPr>
-              <a:t>LinkedList et HashMap</a:t>
-            </a:r>
-            <a:endParaRPr lang="en-US" sz="3000" dirty="0"/>
-          </a:p>
-          <a:p>
-            <a:pPr indent="0" marL="0">
-              <a:buNone/>
-            </a:pPr>
-            <a:r>
-              <a:rPr lang="en-US" sz="3000" b="1" dirty="0">
-                <a:solidFill>
-                  <a:srgbClr val="00A896"/>
-                </a:solidFill>
-                <a:latin typeface="Trebuchet MS" pitchFamily="34" charset="0"/>
-                <a:ea typeface="Trebuchet MS" pitchFamily="34" charset="-122"/>
-                <a:cs typeface="Trebuchet MS" pitchFamily="34" charset="-120"/>
-              </a:rPr>
-              <a:t>Implémentation Java</a:t>
-            </a:r>
-            <a:endParaRPr lang="en-US" sz="3000" dirty="0"/>
-          </a:p>
-        </p:txBody>
-      </p:sp>
-      <p:sp>
-        <p:nvSpPr>
-          <p:cNvPr id="7" name="Shape 5"/>
-          <p:cNvSpPr/>
-          <p:nvPr/>
-        </p:nvSpPr>
-        <p:spPr>
-          <a:xfrm>
-            <a:off x="731520" y="3657600"/>
-            <a:ext cx="2286000" cy="54864"/>
+            <a:ext cx="9144000" cy="73152"/>
           </a:xfrm>
           <a:prstGeom prst="rect">
             <a:avLst/>
@@ -1446,14 +1267,14 @@
       </p:sp>
       <p:sp>
         <p:nvSpPr>
-          <p:cNvPr id="8" name="Text 6"/>
+          <p:cNvPr id="3" name="Text 1"/>
           <p:cNvSpPr/>
           <p:nvPr/>
         </p:nvSpPr>
         <p:spPr>
           <a:xfrm>
-            <a:off x="731520" y="3840480"/>
-            <a:ext cx="7315200" cy="731520"/>
+            <a:off x="548640" y="365760"/>
+            <a:ext cx="2743200" cy="365760"/>
           </a:xfrm>
           <a:prstGeom prst="rect">
             <a:avLst/>
@@ -1469,19 +1290,212 @@
               <a:buNone/>
             </a:pPr>
             <a:r>
-              <a:rPr lang="en-US" sz="1300" i="1" dirty="0">
-                <a:solidFill>
-                  <a:srgbClr val="E2E8F0"/>
+              <a:rPr lang="en-US" sz="1200" b="1" spc="400" kern="0" dirty="0">
+                <a:solidFill>
+                  <a:srgbClr val="F97316"/>
                 </a:solidFill>
                 <a:latin typeface="Calibri" pitchFamily="34" charset="0"/>
                 <a:ea typeface="Calibri" pitchFamily="34" charset="-122"/>
                 <a:cs typeface="Calibri" pitchFamily="34" charset="-120"/>
               </a:rPr>
-              <a:t>P4a</a:t>
+              <a:t>MONDE 3</a:t>
+            </a:r>
+            <a:endParaRPr lang="en-US" sz="1200" dirty="0"/>
+          </a:p>
+        </p:txBody>
+      </p:sp>
+      <p:sp>
+        <p:nvSpPr>
+          <p:cNvPr id="4" name="Text 2"/>
+          <p:cNvSpPr/>
+          <p:nvPr/>
+        </p:nvSpPr>
+        <p:spPr>
+          <a:xfrm>
+            <a:off x="548640" y="731520"/>
+            <a:ext cx="7315200" cy="365760"/>
+          </a:xfrm>
+          <a:prstGeom prst="rect">
+            <a:avLst/>
+          </a:prstGeom>
+          <a:noFill/>
+          <a:ln/>
+        </p:spPr>
+        <p:txBody>
+          <a:bodyPr wrap="square" rtlCol="0" anchor="ctr"/>
+          <a:lstStyle/>
+          <a:p>
+            <a:pPr indent="0" marL="0">
+              <a:buNone/>
+            </a:pPr>
+            <a:r>
+              <a:rPr lang="en-US" sz="1100" dirty="0">
+                <a:solidFill>
+                  <a:srgbClr val="94A3B8"/>
+                </a:solidFill>
+                <a:latin typeface="Calibri" pitchFamily="34" charset="0"/>
+                <a:ea typeface="Calibri" pitchFamily="34" charset="-122"/>
+                <a:cs typeface="Calibri" pitchFamily="34" charset="-120"/>
+              </a:rPr>
+              <a:t>UNIT 19 : Data Structures &amp; Algorithms</a:t>
+            </a:r>
+            <a:endParaRPr lang="en-US" sz="1100" dirty="0"/>
+          </a:p>
+        </p:txBody>
+      </p:sp>
+      <p:sp>
+        <p:nvSpPr>
+          <p:cNvPr id="5" name="Text 3"/>
+          <p:cNvSpPr/>
+          <p:nvPr/>
+        </p:nvSpPr>
+        <p:spPr>
+          <a:xfrm>
+            <a:off x="548640" y="1371600"/>
+            <a:ext cx="8229600" cy="457200"/>
+          </a:xfrm>
+          <a:prstGeom prst="rect">
+            <a:avLst/>
+          </a:prstGeom>
+          <a:noFill/>
+          <a:ln/>
+        </p:spPr>
+        <p:txBody>
+          <a:bodyPr wrap="square" rtlCol="0" anchor="ctr"/>
+          <a:lstStyle/>
+          <a:p>
+            <a:pPr indent="0" marL="0">
+              <a:buNone/>
+            </a:pPr>
+            <a:r>
+              <a:rPr lang="en-US" sz="1400" b="1" dirty="0">
+                <a:solidFill>
+                  <a:srgbClr val="F97316"/>
+                </a:solidFill>
+                <a:latin typeface="Calibri" pitchFamily="34" charset="0"/>
+                <a:ea typeface="Calibri" pitchFamily="34" charset="-122"/>
+                <a:cs typeface="Calibri" pitchFamily="34" charset="-120"/>
+              </a:rPr>
+              <a:t>Chapitre 8</a:t>
+            </a:r>
+            <a:endParaRPr lang="en-US" sz="1400" dirty="0"/>
+          </a:p>
+        </p:txBody>
+      </p:sp>
+      <p:sp>
+        <p:nvSpPr>
+          <p:cNvPr id="6" name="Text 4"/>
+          <p:cNvSpPr/>
+          <p:nvPr/>
+        </p:nvSpPr>
+        <p:spPr>
+          <a:xfrm>
+            <a:off x="548640" y="2011680"/>
+            <a:ext cx="8229600" cy="1371600"/>
+          </a:xfrm>
+          <a:prstGeom prst="rect">
+            <a:avLst/>
+          </a:prstGeom>
+          <a:noFill/>
+          <a:ln/>
+        </p:spPr>
+        <p:txBody>
+          <a:bodyPr wrap="square" rtlCol="0" anchor="ctr"/>
+          <a:lstStyle/>
+          <a:p>
+            <a:pPr indent="0" marL="0">
+              <a:buNone/>
+            </a:pPr>
+            <a:r>
+              <a:rPr lang="en-US" sz="3600" b="1" dirty="0">
+                <a:solidFill>
+                  <a:srgbClr val="FFFFFF"/>
+                </a:solidFill>
+                <a:latin typeface="Calibri" pitchFamily="34" charset="0"/>
+                <a:ea typeface="Calibri" pitchFamily="34" charset="-122"/>
+                <a:cs typeface="Calibri" pitchFamily="34" charset="-120"/>
+              </a:rPr>
+              <a:t>LinkedList &amp; HashMap</a:t>
+            </a:r>
+            <a:endParaRPr lang="en-US" sz="3600" dirty="0"/>
+          </a:p>
+          <a:p>
+            <a:pPr indent="0" marL="0">
+              <a:buNone/>
+            </a:pPr>
+            <a:r>
+              <a:rPr lang="en-US" sz="3600" b="1" dirty="0">
+                <a:solidFill>
+                  <a:srgbClr val="FFFFFF"/>
+                </a:solidFill>
+                <a:latin typeface="Calibri" pitchFamily="34" charset="0"/>
+                <a:ea typeface="Calibri" pitchFamily="34" charset="-122"/>
+                <a:cs typeface="Calibri" pitchFamily="34" charset="-120"/>
+              </a:rPr>
+              <a:t>Implémentation Java</a:t>
+            </a:r>
+            <a:endParaRPr lang="en-US" sz="3600" dirty="0"/>
+          </a:p>
+        </p:txBody>
+      </p:sp>
+      <p:sp>
+        <p:nvSpPr>
+          <p:cNvPr id="7" name="Text 5"/>
+          <p:cNvSpPr/>
+          <p:nvPr/>
+        </p:nvSpPr>
+        <p:spPr>
+          <a:xfrm>
+            <a:off x="548640" y="3657600"/>
+            <a:ext cx="8229600" cy="365760"/>
+          </a:xfrm>
+          <a:prstGeom prst="rect">
+            <a:avLst/>
+          </a:prstGeom>
+          <a:noFill/>
+          <a:ln/>
+        </p:spPr>
+        <p:txBody>
+          <a:bodyPr wrap="square" rtlCol="0" anchor="ctr"/>
+          <a:lstStyle/>
+          <a:p>
+            <a:pPr indent="0" marL="0">
+              <a:buNone/>
+            </a:pPr>
+            <a:r>
+              <a:rPr lang="en-US" sz="1300" dirty="0">
+                <a:solidFill>
+                  <a:srgbClr val="94A3B8"/>
+                </a:solidFill>
+                <a:latin typeface="Calibri" pitchFamily="34" charset="0"/>
+                <a:ea typeface="Calibri" pitchFamily="34" charset="-122"/>
+                <a:cs typeface="Calibri" pitchFamily="34" charset="-120"/>
+              </a:rPr>
+              <a:t>Critère P4 — Implémenter un ADT complexe</a:t>
             </a:r>
             <a:endParaRPr lang="en-US" sz="1300" dirty="0"/>
           </a:p>
         </p:txBody>
+      </p:sp>
+      <p:sp>
+        <p:nvSpPr>
+          <p:cNvPr id="8" name="Shape 6"/>
+          <p:cNvSpPr/>
+          <p:nvPr/>
+        </p:nvSpPr>
+        <p:spPr>
+          <a:xfrm>
+            <a:off x="0" y="5074920"/>
+            <a:ext cx="9144000" cy="73152"/>
+          </a:xfrm>
+          <a:prstGeom prst="rect">
+            <a:avLst/>
+          </a:prstGeom>
+          <a:solidFill>
+            <a:srgbClr val="F97316"/>
+          </a:solidFill>
+          <a:ln/>
+        </p:spPr>
       </p:sp>
     </p:spTree>
   </p:cSld>
@@ -1497,7 +1511,7 @@
     <p:bg>
       <p:bgPr>
         <a:solidFill>
-          <a:srgbClr val="F8FAFC"/>
+          <a:srgbClr val="1A0D00"/>
         </a:solidFill>
       </p:bgPr>
     </p:bg>
@@ -1524,13 +1538,13 @@
         <p:spPr>
           <a:xfrm>
             <a:off x="0" y="0"/>
-            <a:ext cx="109728" cy="5143500"/>
+            <a:ext cx="9144000" cy="54864"/>
           </a:xfrm>
           <a:prstGeom prst="rect">
             <a:avLst/>
           </a:prstGeom>
           <a:solidFill>
-            <a:srgbClr val="DC2626"/>
+            <a:srgbClr val="F97316"/>
           </a:solidFill>
           <a:ln/>
         </p:spPr>
@@ -1543,8 +1557,8 @@
         </p:nvSpPr>
         <p:spPr>
           <a:xfrm>
-            <a:off x="457200" y="274320"/>
-            <a:ext cx="8229600" cy="457200"/>
+            <a:off x="548640" y="274320"/>
+            <a:ext cx="8229600" cy="548640"/>
           </a:xfrm>
           <a:prstGeom prst="rect">
             <a:avLst/>
@@ -1560,50 +1574,164 @@
               <a:buNone/>
             </a:pPr>
             <a:r>
-              <a:rPr lang="en-US" sz="2600" b="1" dirty="0">
-                <a:solidFill>
-                  <a:srgbClr val="1B2A4A"/>
-                </a:solidFill>
-                <a:latin typeface="Trebuchet MS" pitchFamily="34" charset="0"/>
-                <a:ea typeface="Trebuchet MS" pitchFamily="34" charset="-122"/>
-                <a:cs typeface="Trebuchet MS" pitchFamily="34" charset="-120"/>
-              </a:rPr>
-              <a:t>LinkedList en Java : structure interne</a:t>
-            </a:r>
-            <a:endParaRPr lang="en-US" sz="2600" dirty="0"/>
-          </a:p>
-        </p:txBody>
-      </p:sp>
-      <p:sp>
-        <p:nvSpPr>
-          <p:cNvPr id="4" name="Shape 2"/>
+              <a:rPr lang="en-US" sz="2400" b="1" dirty="0">
+                <a:solidFill>
+                  <a:srgbClr val="FFFFFF"/>
+                </a:solidFill>
+                <a:latin typeface="Calibri" pitchFamily="34" charset="0"/>
+                <a:ea typeface="Calibri" pitchFamily="34" charset="-122"/>
+                <a:cs typeface="Calibri" pitchFamily="34" charset="-120"/>
+              </a:rPr>
+              <a:t>LinkedList : structure interne</a:t>
+            </a:r>
+            <a:endParaRPr lang="en-US" sz="2400" dirty="0"/>
+          </a:p>
+        </p:txBody>
+      </p:sp>
+      <p:sp>
+        <p:nvSpPr>
+          <p:cNvPr id="4" name="Text 2"/>
           <p:cNvSpPr/>
           <p:nvPr/>
         </p:nvSpPr>
         <p:spPr>
           <a:xfrm>
-            <a:off x="457200" y="822960"/>
-            <a:ext cx="8229600" cy="3840480"/>
-          </a:xfrm>
-          <a:prstGeom prst="rect">
-            <a:avLst/>
+            <a:off x="548640" y="1005840"/>
+            <a:ext cx="3840480" cy="3200400"/>
+          </a:xfrm>
+          <a:prstGeom prst="rect">
+            <a:avLst/>
+          </a:prstGeom>
+          <a:noFill/>
+          <a:ln/>
+        </p:spPr>
+        <p:txBody>
+          <a:bodyPr wrap="square" rtlCol="0" anchor="t"/>
+          <a:lstStyle/>
+          <a:p>
+            <a:pPr marL="342900" indent="-342900">
+              <a:buSzPct val="100000"/>
+              <a:buChar char="•"/>
+            </a:pPr>
+            <a:r>
+              <a:rPr lang="en-US" sz="1300" dirty="0">
+                <a:solidFill>
+                  <a:srgbClr val="E2E8F0"/>
+                </a:solidFill>
+                <a:latin typeface="Calibri" pitchFamily="34" charset="0"/>
+                <a:ea typeface="Calibri" pitchFamily="34" charset="-122"/>
+                <a:cs typeface="Calibri" pitchFamily="34" charset="-120"/>
+              </a:rPr>
+              <a:t>Chaque nœud contient : data + pointeur next</a:t>
+            </a:r>
+            <a:endParaRPr lang="en-US" sz="1300" dirty="0"/>
+          </a:p>
+          <a:p>
+            <a:pPr marL="342900" indent="-342900">
+              <a:buSzPct val="100000"/>
+              <a:buChar char="•"/>
+            </a:pPr>
+            <a:r>
+              <a:rPr lang="en-US" sz="1300" dirty="0">
+                <a:solidFill>
+                  <a:srgbClr val="E2E8F0"/>
+                </a:solidFill>
+                <a:latin typeface="Calibri" pitchFamily="34" charset="0"/>
+                <a:ea typeface="Calibri" pitchFamily="34" charset="-122"/>
+                <a:cs typeface="Calibri" pitchFamily="34" charset="-120"/>
+              </a:rPr>
+              <a:t>3 types : simple, double (prev+next), circulaire</a:t>
+            </a:r>
+            <a:endParaRPr lang="en-US" sz="1300" dirty="0"/>
+          </a:p>
+          <a:p>
+            <a:pPr marL="342900" indent="-342900">
+              <a:buSzPct val="100000"/>
+              <a:buChar char="•"/>
+            </a:pPr>
+            <a:r>
+              <a:rPr lang="en-US" sz="1300" dirty="0">
+                <a:solidFill>
+                  <a:srgbClr val="E2E8F0"/>
+                </a:solidFill>
+                <a:latin typeface="Calibri" pitchFamily="34" charset="0"/>
+                <a:ea typeface="Calibri" pitchFamily="34" charset="-122"/>
+                <a:cs typeface="Calibri" pitchFamily="34" charset="-120"/>
+              </a:rPr>
+              <a:t>Avantage : insertion O(1) si on a la référence au nœud</a:t>
+            </a:r>
+            <a:endParaRPr lang="en-US" sz="1300" dirty="0"/>
+          </a:p>
+          <a:p>
+            <a:pPr marL="342900" indent="-342900">
+              <a:buSzPct val="100000"/>
+              <a:buChar char="•"/>
+            </a:pPr>
+            <a:r>
+              <a:rPr lang="en-US" sz="1300" dirty="0">
+                <a:solidFill>
+                  <a:srgbClr val="E2E8F0"/>
+                </a:solidFill>
+                <a:latin typeface="Calibri" pitchFamily="34" charset="0"/>
+                <a:ea typeface="Calibri" pitchFamily="34" charset="-122"/>
+                <a:cs typeface="Calibri" pitchFamily="34" charset="-120"/>
+              </a:rPr>
+              <a:t>Inconvénient : accès par index O(n) (parcours séquentiel)</a:t>
+            </a:r>
+            <a:endParaRPr lang="en-US" sz="1300" dirty="0"/>
+          </a:p>
+          <a:p>
+            <a:pPr marL="342900" indent="-342900">
+              <a:buSzPct val="100000"/>
+              <a:buChar char="•"/>
+            </a:pPr>
+            <a:r>
+              <a:rPr lang="en-US" sz="1300" dirty="0">
+                <a:solidFill>
+                  <a:srgbClr val="E2E8F0"/>
+                </a:solidFill>
+                <a:latin typeface="Calibri" pitchFamily="34" charset="0"/>
+                <a:ea typeface="Calibri" pitchFamily="34" charset="-122"/>
+                <a:cs typeface="Calibri" pitchFamily="34" charset="-120"/>
+              </a:rPr>
+              <a:t>Java : java.util.LinkedList&lt;E&gt; implémente List et Deque</a:t>
+            </a:r>
+            <a:endParaRPr lang="en-US" sz="1300" dirty="0"/>
+          </a:p>
+        </p:txBody>
+      </p:sp>
+      <p:sp>
+        <p:nvSpPr>
+          <p:cNvPr id="5" name="Shape 3"/>
+          <p:cNvSpPr/>
+          <p:nvPr/>
+        </p:nvSpPr>
+        <p:spPr>
+          <a:xfrm>
+            <a:off x="4754880" y="1005840"/>
+            <a:ext cx="4023360" cy="3200400"/>
+          </a:xfrm>
+          <a:prstGeom prst="roundRect">
+            <a:avLst>
+              <a:gd name="adj" fmla="val 2857"/>
+            </a:avLst>
           </a:prstGeom>
           <a:solidFill>
-            <a:srgbClr val="1E293B"/>
+            <a:srgbClr val="0D1117"/>
           </a:solidFill>
           <a:ln/>
         </p:spPr>
       </p:sp>
       <p:sp>
         <p:nvSpPr>
-          <p:cNvPr id="5" name="Text 3"/>
+          <p:cNvPr id="6" name="Text 4"/>
           <p:cNvSpPr/>
           <p:nvPr/>
         </p:nvSpPr>
         <p:spPr>
           <a:xfrm>
-            <a:off x="640080" y="914400"/>
-            <a:ext cx="7863840" cy="3657600"/>
+            <a:off x="4937760" y="1143000"/>
+            <a:ext cx="3657600" cy="2926080"/>
           </a:xfrm>
           <a:prstGeom prst="rect">
             <a:avLst/>
@@ -1612,540 +1740,132 @@
           <a:ln/>
         </p:spPr>
         <p:txBody>
-          <a:bodyPr wrap="square" rtlCol="0" anchor="ctr"/>
+          <a:bodyPr wrap="square" rtlCol="0" anchor="t"/>
           <a:lstStyle/>
           <a:p>
             <a:pPr indent="0" marL="0">
               <a:buNone/>
             </a:pPr>
             <a:r>
-              <a:rPr lang="en-US" sz="1100" dirty="0">
-                <a:solidFill>
-                  <a:srgbClr val="64748B"/>
+              <a:rPr lang="en-US" sz="1000" dirty="0">
+                <a:solidFill>
+                  <a:srgbClr val="A5F3FC"/>
                 </a:solidFill>
                 <a:latin typeface="Consolas" pitchFamily="34" charset="0"/>
                 <a:ea typeface="Consolas" pitchFamily="34" charset="-122"/>
                 <a:cs typeface="Consolas" pitchFamily="34" charset="-120"/>
               </a:rPr>
-              <a:t>// Un noeud de la liste chaînée</a:t>
-            </a:r>
-            <a:endParaRPr lang="en-US" sz="1100" dirty="0"/>
+              <a:t>class Node&lt;E&gt; {</a:t>
+            </a:r>
+            <a:endParaRPr lang="en-US" sz="1000" dirty="0"/>
           </a:p>
           <a:p>
             <a:pPr indent="0" marL="0">
               <a:buNone/>
             </a:pPr>
             <a:r>
-              <a:rPr lang="en-US" sz="1100" dirty="0">
-                <a:solidFill>
-                  <a:srgbClr val="7C3AED"/>
+              <a:rPr lang="en-US" sz="1000" dirty="0">
+                <a:solidFill>
+                  <a:srgbClr val="A5F3FC"/>
                 </a:solidFill>
                 <a:latin typeface="Consolas" pitchFamily="34" charset="0"/>
                 <a:ea typeface="Consolas" pitchFamily="34" charset="-122"/>
                 <a:cs typeface="Consolas" pitchFamily="34" charset="-120"/>
               </a:rPr>
-              <a:t>class Node&lt;E&gt; {</a:t>
-            </a:r>
-            <a:endParaRPr lang="en-US" sz="1100" dirty="0"/>
+              <a:t>    E data;</a:t>
+            </a:r>
+            <a:endParaRPr lang="en-US" sz="1000" dirty="0"/>
           </a:p>
           <a:p>
             <a:pPr indent="0" marL="0">
               <a:buNone/>
             </a:pPr>
             <a:r>
-              <a:rPr lang="en-US" sz="1100" dirty="0">
-                <a:solidFill>
-                  <a:srgbClr val="E2E8F0"/>
+              <a:rPr lang="en-US" sz="1000" dirty="0">
+                <a:solidFill>
+                  <a:srgbClr val="A5F3FC"/>
                 </a:solidFill>
                 <a:latin typeface="Consolas" pitchFamily="34" charset="0"/>
                 <a:ea typeface="Consolas" pitchFamily="34" charset="-122"/>
                 <a:cs typeface="Consolas" pitchFamily="34" charset="-120"/>
               </a:rPr>
-              <a:t>    E data;           // la donnée</a:t>
-            </a:r>
-            <a:endParaRPr lang="en-US" sz="1100" dirty="0"/>
+              <a:t>    Node&lt;E&gt; next;</a:t>
+            </a:r>
+            <a:endParaRPr lang="en-US" sz="1000" dirty="0"/>
           </a:p>
           <a:p>
             <a:pPr indent="0" marL="0">
               <a:buNone/>
             </a:pPr>
             <a:r>
-              <a:rPr lang="en-US" sz="1100" dirty="0">
-                <a:solidFill>
-                  <a:srgbClr val="E2E8F0"/>
+              <a:rPr lang="en-US" sz="1000" dirty="0">
+                <a:solidFill>
+                  <a:srgbClr val="A5F3FC"/>
                 </a:solidFill>
                 <a:latin typeface="Consolas" pitchFamily="34" charset="0"/>
                 <a:ea typeface="Consolas" pitchFamily="34" charset="-122"/>
                 <a:cs typeface="Consolas" pitchFamily="34" charset="-120"/>
               </a:rPr>
-              <a:t>    Node&lt;E&gt; next;     // pointeur vers le suivant</a:t>
-            </a:r>
-            <a:endParaRPr lang="en-US" sz="1100" dirty="0"/>
+              <a:t>}</a:t>
+            </a:r>
+            <a:endParaRPr lang="en-US" sz="1000" dirty="0"/>
           </a:p>
           <a:p>
             <a:pPr indent="0" marL="0">
               <a:buNone/>
             </a:pPr>
-            <a:r>
-              <a:rPr lang="en-US" sz="1100" dirty="0">
-                <a:solidFill>
-                  <a:srgbClr val="E2E8F0"/>
+            <a:endParaRPr lang="en-US" sz="1000" dirty="0"/>
+          </a:p>
+          <a:p>
+            <a:pPr indent="0" marL="0">
+              <a:buNone/>
+            </a:pPr>
+            <a:r>
+              <a:rPr lang="en-US" sz="1000" dirty="0">
+                <a:solidFill>
+                  <a:srgbClr val="A5F3FC"/>
                 </a:solidFill>
                 <a:latin typeface="Consolas" pitchFamily="34" charset="0"/>
                 <a:ea typeface="Consolas" pitchFamily="34" charset="-122"/>
                 <a:cs typeface="Consolas" pitchFamily="34" charset="-120"/>
               </a:rPr>
-              <a:t>    </a:t>
-            </a:r>
-            <a:endParaRPr lang="en-US" sz="1100" dirty="0"/>
+              <a:t>// Simple: A → B → C → null</a:t>
+            </a:r>
+            <a:endParaRPr lang="en-US" sz="1000" dirty="0"/>
           </a:p>
           <a:p>
             <a:pPr indent="0" marL="0">
               <a:buNone/>
             </a:pPr>
             <a:r>
-              <a:rPr lang="en-US" sz="1100" dirty="0">
-                <a:solidFill>
-                  <a:srgbClr val="E2E8F0"/>
+              <a:rPr lang="en-US" sz="1000" dirty="0">
+                <a:solidFill>
+                  <a:srgbClr val="A5F3FC"/>
                 </a:solidFill>
                 <a:latin typeface="Consolas" pitchFamily="34" charset="0"/>
                 <a:ea typeface="Consolas" pitchFamily="34" charset="-122"/>
                 <a:cs typeface="Consolas" pitchFamily="34" charset="-120"/>
               </a:rPr>
-              <a:t>    Node(E data) {</a:t>
-            </a:r>
-            <a:endParaRPr lang="en-US" sz="1100" dirty="0"/>
+              <a:t>// Double: null ← A ↔ B ↔ C → null</a:t>
+            </a:r>
+            <a:endParaRPr lang="en-US" sz="1000" dirty="0"/>
           </a:p>
           <a:p>
             <a:pPr indent="0" marL="0">
               <a:buNone/>
             </a:pPr>
             <a:r>
-              <a:rPr lang="en-US" sz="1100" dirty="0">
-                <a:solidFill>
-                  <a:srgbClr val="E2E8F0"/>
+              <a:rPr lang="en-US" sz="1000" dirty="0">
+                <a:solidFill>
+                  <a:srgbClr val="A5F3FC"/>
                 </a:solidFill>
                 <a:latin typeface="Consolas" pitchFamily="34" charset="0"/>
                 <a:ea typeface="Consolas" pitchFamily="34" charset="-122"/>
                 <a:cs typeface="Consolas" pitchFamily="34" charset="-120"/>
               </a:rPr>
-              <a:t>        this.data = data;</a:t>
-            </a:r>
-            <a:endParaRPr lang="en-US" sz="1100" dirty="0"/>
-          </a:p>
-          <a:p>
-            <a:pPr indent="0" marL="0">
-              <a:buNone/>
-            </a:pPr>
-            <a:r>
-              <a:rPr lang="en-US" sz="1100" dirty="0">
-                <a:solidFill>
-                  <a:srgbClr val="E2E8F0"/>
-                </a:solidFill>
-                <a:latin typeface="Consolas" pitchFamily="34" charset="0"/>
-                <a:ea typeface="Consolas" pitchFamily="34" charset="-122"/>
-                <a:cs typeface="Consolas" pitchFamily="34" charset="-120"/>
-              </a:rPr>
-              <a:t>        this.next = null;</a:t>
-            </a:r>
-            <a:endParaRPr lang="en-US" sz="1100" dirty="0"/>
-          </a:p>
-          <a:p>
-            <a:pPr indent="0" marL="0">
-              <a:buNone/>
-            </a:pPr>
-            <a:r>
-              <a:rPr lang="en-US" sz="1100" dirty="0">
-                <a:solidFill>
-                  <a:srgbClr val="E2E8F0"/>
-                </a:solidFill>
-                <a:latin typeface="Consolas" pitchFamily="34" charset="0"/>
-                <a:ea typeface="Consolas" pitchFamily="34" charset="-122"/>
-                <a:cs typeface="Consolas" pitchFamily="34" charset="-120"/>
-              </a:rPr>
-              <a:t>    }</a:t>
-            </a:r>
-            <a:endParaRPr lang="en-US" sz="1100" dirty="0"/>
-          </a:p>
-          <a:p>
-            <a:pPr indent="0" marL="0">
-              <a:buNone/>
-            </a:pPr>
-            <a:r>
-              <a:rPr lang="en-US" sz="1100" dirty="0">
-                <a:solidFill>
-                  <a:srgbClr val="E2E8F0"/>
-                </a:solidFill>
-                <a:latin typeface="Consolas" pitchFamily="34" charset="0"/>
-                <a:ea typeface="Consolas" pitchFamily="34" charset="-122"/>
-                <a:cs typeface="Consolas" pitchFamily="34" charset="-120"/>
-              </a:rPr>
-              <a:t>}</a:t>
-            </a:r>
-            <a:endParaRPr lang="en-US" sz="1100" dirty="0"/>
-          </a:p>
-          <a:p>
-            <a:pPr indent="0" marL="0">
-              <a:buNone/>
-            </a:pPr>
-            <a:endParaRPr lang="en-US" sz="1100" dirty="0"/>
-          </a:p>
-          <a:p>
-            <a:pPr indent="0" marL="0">
-              <a:buNone/>
-            </a:pPr>
-            <a:r>
-              <a:rPr lang="en-US" sz="1100" dirty="0">
-                <a:solidFill>
-                  <a:srgbClr val="64748B"/>
-                </a:solidFill>
-                <a:latin typeface="Consolas" pitchFamily="34" charset="0"/>
-                <a:ea typeface="Consolas" pitchFamily="34" charset="-122"/>
-                <a:cs typeface="Consolas" pitchFamily="34" charset="-120"/>
-              </a:rPr>
-              <a:t>// La liste chaînée</a:t>
-            </a:r>
-            <a:endParaRPr lang="en-US" sz="1100" dirty="0"/>
-          </a:p>
-          <a:p>
-            <a:pPr indent="0" marL="0">
-              <a:buNone/>
-            </a:pPr>
-            <a:r>
-              <a:rPr lang="en-US" sz="1100" dirty="0">
-                <a:solidFill>
-                  <a:srgbClr val="7C3AED"/>
-                </a:solidFill>
-                <a:latin typeface="Consolas" pitchFamily="34" charset="0"/>
-                <a:ea typeface="Consolas" pitchFamily="34" charset="-122"/>
-                <a:cs typeface="Consolas" pitchFamily="34" charset="-120"/>
-              </a:rPr>
-              <a:t>class MaLinkedList&lt;E&gt; {</a:t>
-            </a:r>
-            <a:endParaRPr lang="en-US" sz="1100" dirty="0"/>
-          </a:p>
-          <a:p>
-            <a:pPr indent="0" marL="0">
-              <a:buNone/>
-            </a:pPr>
-            <a:r>
-              <a:rPr lang="en-US" sz="1100" dirty="0">
-                <a:solidFill>
-                  <a:srgbClr val="E2E8F0"/>
-                </a:solidFill>
-                <a:latin typeface="Consolas" pitchFamily="34" charset="0"/>
-                <a:ea typeface="Consolas" pitchFamily="34" charset="-122"/>
-                <a:cs typeface="Consolas" pitchFamily="34" charset="-120"/>
-              </a:rPr>
-              <a:t>    Node&lt;E&gt; head;     // premier noeud</a:t>
-            </a:r>
-            <a:endParaRPr lang="en-US" sz="1100" dirty="0"/>
-          </a:p>
-          <a:p>
-            <a:pPr indent="0" marL="0">
-              <a:buNone/>
-            </a:pPr>
-            <a:r>
-              <a:rPr lang="en-US" sz="1100" dirty="0">
-                <a:solidFill>
-                  <a:srgbClr val="E2E8F0"/>
-                </a:solidFill>
-                <a:latin typeface="Consolas" pitchFamily="34" charset="0"/>
-                <a:ea typeface="Consolas" pitchFamily="34" charset="-122"/>
-                <a:cs typeface="Consolas" pitchFamily="34" charset="-120"/>
-              </a:rPr>
-              <a:t>    int size;</a:t>
-            </a:r>
-            <a:endParaRPr lang="en-US" sz="1100" dirty="0"/>
-          </a:p>
-          <a:p>
-            <a:pPr indent="0" marL="0">
-              <a:buNone/>
-            </a:pPr>
-            <a:r>
-              <a:rPr lang="en-US" sz="1100" dirty="0">
-                <a:solidFill>
-                  <a:srgbClr val="E2E8F0"/>
-                </a:solidFill>
-                <a:latin typeface="Consolas" pitchFamily="34" charset="0"/>
-                <a:ea typeface="Consolas" pitchFamily="34" charset="-122"/>
-                <a:cs typeface="Consolas" pitchFamily="34" charset="-120"/>
-              </a:rPr>
-              <a:t>    </a:t>
-            </a:r>
-            <a:endParaRPr lang="en-US" sz="1100" dirty="0"/>
-          </a:p>
-          <a:p>
-            <a:pPr indent="0" marL="0">
-              <a:buNone/>
-            </a:pPr>
-            <a:r>
-              <a:rPr lang="en-US" sz="1100" dirty="0">
-                <a:solidFill>
-                  <a:srgbClr val="64748B"/>
-                </a:solidFill>
-                <a:latin typeface="Consolas" pitchFamily="34" charset="0"/>
-                <a:ea typeface="Consolas" pitchFamily="34" charset="-122"/>
-                <a:cs typeface="Consolas" pitchFamily="34" charset="-120"/>
-              </a:rPr>
-              <a:t>    // Ajouter en tête : O(1)</a:t>
-            </a:r>
-            <a:endParaRPr lang="en-US" sz="1100" dirty="0"/>
-          </a:p>
-          <a:p>
-            <a:pPr indent="0" marL="0">
-              <a:buNone/>
-            </a:pPr>
-            <a:r>
-              <a:rPr lang="en-US" sz="1100" dirty="0">
-                <a:solidFill>
-                  <a:srgbClr val="E2E8F0"/>
-                </a:solidFill>
-                <a:latin typeface="Consolas" pitchFamily="34" charset="0"/>
-                <a:ea typeface="Consolas" pitchFamily="34" charset="-122"/>
-                <a:cs typeface="Consolas" pitchFamily="34" charset="-120"/>
-              </a:rPr>
-              <a:t>    void addFirst(E e) {</a:t>
-            </a:r>
-            <a:endParaRPr lang="en-US" sz="1100" dirty="0"/>
-          </a:p>
-          <a:p>
-            <a:pPr indent="0" marL="0">
-              <a:buNone/>
-            </a:pPr>
-            <a:r>
-              <a:rPr lang="en-US" sz="1100" dirty="0">
-                <a:solidFill>
-                  <a:srgbClr val="E2E8F0"/>
-                </a:solidFill>
-                <a:latin typeface="Consolas" pitchFamily="34" charset="0"/>
-                <a:ea typeface="Consolas" pitchFamily="34" charset="-122"/>
-                <a:cs typeface="Consolas" pitchFamily="34" charset="-120"/>
-              </a:rPr>
-              <a:t>        Node&lt;E&gt; nouveau = new Node&lt;&gt;(e);</a:t>
-            </a:r>
-            <a:endParaRPr lang="en-US" sz="1100" dirty="0"/>
-          </a:p>
-          <a:p>
-            <a:pPr indent="0" marL="0">
-              <a:buNone/>
-            </a:pPr>
-            <a:r>
-              <a:rPr lang="en-US" sz="1100" dirty="0">
-                <a:solidFill>
-                  <a:srgbClr val="E2E8F0"/>
-                </a:solidFill>
-                <a:latin typeface="Consolas" pitchFamily="34" charset="0"/>
-                <a:ea typeface="Consolas" pitchFamily="34" charset="-122"/>
-                <a:cs typeface="Consolas" pitchFamily="34" charset="-120"/>
-              </a:rPr>
-              <a:t>        nouveau.next = head;</a:t>
-            </a:r>
-            <a:endParaRPr lang="en-US" sz="1100" dirty="0"/>
-          </a:p>
-          <a:p>
-            <a:pPr indent="0" marL="0">
-              <a:buNone/>
-            </a:pPr>
-            <a:r>
-              <a:rPr lang="en-US" sz="1100" dirty="0">
-                <a:solidFill>
-                  <a:srgbClr val="E2E8F0"/>
-                </a:solidFill>
-                <a:latin typeface="Consolas" pitchFamily="34" charset="0"/>
-                <a:ea typeface="Consolas" pitchFamily="34" charset="-122"/>
-                <a:cs typeface="Consolas" pitchFamily="34" charset="-120"/>
-              </a:rPr>
-              <a:t>        head = nouveau;</a:t>
-            </a:r>
-            <a:endParaRPr lang="en-US" sz="1100" dirty="0"/>
-          </a:p>
-          <a:p>
-            <a:pPr indent="0" marL="0">
-              <a:buNone/>
-            </a:pPr>
-            <a:r>
-              <a:rPr lang="en-US" sz="1100" dirty="0">
-                <a:solidFill>
-                  <a:srgbClr val="E2E8F0"/>
-                </a:solidFill>
-                <a:latin typeface="Consolas" pitchFamily="34" charset="0"/>
-                <a:ea typeface="Consolas" pitchFamily="34" charset="-122"/>
-                <a:cs typeface="Consolas" pitchFamily="34" charset="-120"/>
-              </a:rPr>
-              <a:t>        size++;</a:t>
-            </a:r>
-            <a:endParaRPr lang="en-US" sz="1100" dirty="0"/>
-          </a:p>
-          <a:p>
-            <a:pPr indent="0" marL="0">
-              <a:buNone/>
-            </a:pPr>
-            <a:r>
-              <a:rPr lang="en-US" sz="1100" dirty="0">
-                <a:solidFill>
-                  <a:srgbClr val="E2E8F0"/>
-                </a:solidFill>
-                <a:latin typeface="Consolas" pitchFamily="34" charset="0"/>
-                <a:ea typeface="Consolas" pitchFamily="34" charset="-122"/>
-                <a:cs typeface="Consolas" pitchFamily="34" charset="-120"/>
-              </a:rPr>
-              <a:t>    }</a:t>
-            </a:r>
-            <a:endParaRPr lang="en-US" sz="1100" dirty="0"/>
-          </a:p>
-          <a:p>
-            <a:pPr indent="0" marL="0">
-              <a:buNone/>
-            </a:pPr>
-            <a:r>
-              <a:rPr lang="en-US" sz="1100" dirty="0">
-                <a:solidFill>
-                  <a:srgbClr val="E2E8F0"/>
-                </a:solidFill>
-                <a:latin typeface="Consolas" pitchFamily="34" charset="0"/>
-                <a:ea typeface="Consolas" pitchFamily="34" charset="-122"/>
-                <a:cs typeface="Consolas" pitchFamily="34" charset="-120"/>
-              </a:rPr>
-              <a:t>    </a:t>
-            </a:r>
-            <a:endParaRPr lang="en-US" sz="1100" dirty="0"/>
-          </a:p>
-          <a:p>
-            <a:pPr indent="0" marL="0">
-              <a:buNone/>
-            </a:pPr>
-            <a:r>
-              <a:rPr lang="en-US" sz="1100" dirty="0">
-                <a:solidFill>
-                  <a:srgbClr val="64748B"/>
-                </a:solidFill>
-                <a:latin typeface="Consolas" pitchFamily="34" charset="0"/>
-                <a:ea typeface="Consolas" pitchFamily="34" charset="-122"/>
-                <a:cs typeface="Consolas" pitchFamily="34" charset="-120"/>
-              </a:rPr>
-              <a:t>    // Chercher : O(n) — parcourir toute la liste</a:t>
-            </a:r>
-            <a:endParaRPr lang="en-US" sz="1100" dirty="0"/>
-          </a:p>
-          <a:p>
-            <a:pPr indent="0" marL="0">
-              <a:buNone/>
-            </a:pPr>
-            <a:r>
-              <a:rPr lang="en-US" sz="1100" dirty="0">
-                <a:solidFill>
-                  <a:srgbClr val="E2E8F0"/>
-                </a:solidFill>
-                <a:latin typeface="Consolas" pitchFamily="34" charset="0"/>
-                <a:ea typeface="Consolas" pitchFamily="34" charset="-122"/>
-                <a:cs typeface="Consolas" pitchFamily="34" charset="-120"/>
-              </a:rPr>
-              <a:t>    E get(int index) {</a:t>
-            </a:r>
-            <a:endParaRPr lang="en-US" sz="1100" dirty="0"/>
-          </a:p>
-          <a:p>
-            <a:pPr indent="0" marL="0">
-              <a:buNone/>
-            </a:pPr>
-            <a:r>
-              <a:rPr lang="en-US" sz="1100" dirty="0">
-                <a:solidFill>
-                  <a:srgbClr val="E2E8F0"/>
-                </a:solidFill>
-                <a:latin typeface="Consolas" pitchFamily="34" charset="0"/>
-                <a:ea typeface="Consolas" pitchFamily="34" charset="-122"/>
-                <a:cs typeface="Consolas" pitchFamily="34" charset="-120"/>
-              </a:rPr>
-              <a:t>        Node&lt;E&gt; current = head;</a:t>
-            </a:r>
-            <a:endParaRPr lang="en-US" sz="1100" dirty="0"/>
-          </a:p>
-          <a:p>
-            <a:pPr indent="0" marL="0">
-              <a:buNone/>
-            </a:pPr>
-            <a:r>
-              <a:rPr lang="en-US" sz="1100" dirty="0">
-                <a:solidFill>
-                  <a:srgbClr val="E2E8F0"/>
-                </a:solidFill>
-                <a:latin typeface="Consolas" pitchFamily="34" charset="0"/>
-                <a:ea typeface="Consolas" pitchFamily="34" charset="-122"/>
-                <a:cs typeface="Consolas" pitchFamily="34" charset="-120"/>
-              </a:rPr>
-              <a:t>        for (int i = 0; i &lt; index; i++)</a:t>
-            </a:r>
-            <a:endParaRPr lang="en-US" sz="1100" dirty="0"/>
-          </a:p>
-          <a:p>
-            <a:pPr indent="0" marL="0">
-              <a:buNone/>
-            </a:pPr>
-            <a:r>
-              <a:rPr lang="en-US" sz="1100" dirty="0">
-                <a:solidFill>
-                  <a:srgbClr val="E2E8F0"/>
-                </a:solidFill>
-                <a:latin typeface="Consolas" pitchFamily="34" charset="0"/>
-                <a:ea typeface="Consolas" pitchFamily="34" charset="-122"/>
-                <a:cs typeface="Consolas" pitchFamily="34" charset="-120"/>
-              </a:rPr>
-              <a:t>            current = current.next;</a:t>
-            </a:r>
-            <a:endParaRPr lang="en-US" sz="1100" dirty="0"/>
-          </a:p>
-          <a:p>
-            <a:pPr indent="0" marL="0">
-              <a:buNone/>
-            </a:pPr>
-            <a:r>
-              <a:rPr lang="en-US" sz="1100" dirty="0">
-                <a:solidFill>
-                  <a:srgbClr val="E2E8F0"/>
-                </a:solidFill>
-                <a:latin typeface="Consolas" pitchFamily="34" charset="0"/>
-                <a:ea typeface="Consolas" pitchFamily="34" charset="-122"/>
-                <a:cs typeface="Consolas" pitchFamily="34" charset="-120"/>
-              </a:rPr>
-              <a:t>        return current.data;</a:t>
-            </a:r>
-            <a:endParaRPr lang="en-US" sz="1100" dirty="0"/>
-          </a:p>
-          <a:p>
-            <a:pPr indent="0" marL="0">
-              <a:buNone/>
-            </a:pPr>
-            <a:r>
-              <a:rPr lang="en-US" sz="1100" dirty="0">
-                <a:solidFill>
-                  <a:srgbClr val="E2E8F0"/>
-                </a:solidFill>
-                <a:latin typeface="Consolas" pitchFamily="34" charset="0"/>
-                <a:ea typeface="Consolas" pitchFamily="34" charset="-122"/>
-                <a:cs typeface="Consolas" pitchFamily="34" charset="-120"/>
-              </a:rPr>
-              <a:t>    }</a:t>
-            </a:r>
-            <a:endParaRPr lang="en-US" sz="1100" dirty="0"/>
-          </a:p>
-          <a:p>
-            <a:pPr indent="0" marL="0">
-              <a:buNone/>
-            </a:pPr>
-            <a:r>
-              <a:rPr lang="en-US" sz="1100" dirty="0">
-                <a:solidFill>
-                  <a:srgbClr val="E2E8F0"/>
-                </a:solidFill>
-                <a:latin typeface="Consolas" pitchFamily="34" charset="0"/>
-                <a:ea typeface="Consolas" pitchFamily="34" charset="-122"/>
-                <a:cs typeface="Consolas" pitchFamily="34" charset="-120"/>
-              </a:rPr>
-              <a:t>}</a:t>
-            </a:r>
-            <a:endParaRPr lang="en-US" sz="1100" dirty="0"/>
+              <a:t>// Circulaire: A → B → C → A</a:t>
+            </a:r>
+            <a:endParaRPr lang="en-US" sz="1000" dirty="0"/>
           </a:p>
         </p:txBody>
       </p:sp>
@@ -2163,7 +1883,7 @@
     <p:bg>
       <p:bgPr>
         <a:solidFill>
-          <a:srgbClr val="F8FAFC"/>
+          <a:srgbClr val="1A0D00"/>
         </a:solidFill>
       </p:bgPr>
     </p:bg>
@@ -2190,13 +1910,13 @@
         <p:spPr>
           <a:xfrm>
             <a:off x="0" y="0"/>
-            <a:ext cx="109728" cy="5143500"/>
+            <a:ext cx="9144000" cy="54864"/>
           </a:xfrm>
           <a:prstGeom prst="rect">
             <a:avLst/>
           </a:prstGeom>
           <a:solidFill>
-            <a:srgbClr val="DC2626"/>
+            <a:srgbClr val="F97316"/>
           </a:solidFill>
           <a:ln/>
         </p:spPr>
@@ -2209,8 +1929,8 @@
         </p:nvSpPr>
         <p:spPr>
           <a:xfrm>
-            <a:off x="457200" y="274320"/>
-            <a:ext cx="8229600" cy="457200"/>
+            <a:off x="548640" y="274320"/>
+            <a:ext cx="8229600" cy="548640"/>
           </a:xfrm>
           <a:prstGeom prst="rect">
             <a:avLst/>
@@ -2226,50 +1946,164 @@
               <a:buNone/>
             </a:pPr>
             <a:r>
-              <a:rPr lang="en-US" sz="2600" b="1" dirty="0">
-                <a:solidFill>
-                  <a:srgbClr val="1B2A4A"/>
-                </a:solidFill>
-                <a:latin typeface="Trebuchet MS" pitchFamily="34" charset="0"/>
-                <a:ea typeface="Trebuchet MS" pitchFamily="34" charset="-122"/>
-                <a:cs typeface="Trebuchet MS" pitchFamily="34" charset="-120"/>
-              </a:rPr>
-              <a:t>HashMap en Java : hash function + buckets</a:t>
-            </a:r>
-            <a:endParaRPr lang="en-US" sz="2600" dirty="0"/>
-          </a:p>
-        </p:txBody>
-      </p:sp>
-      <p:sp>
-        <p:nvSpPr>
-          <p:cNvPr id="4" name="Shape 2"/>
+              <a:rPr lang="en-US" sz="2400" b="1" dirty="0">
+                <a:solidFill>
+                  <a:srgbClr val="FFFFFF"/>
+                </a:solidFill>
+                <a:latin typeface="Calibri" pitchFamily="34" charset="0"/>
+                <a:ea typeface="Calibri" pitchFamily="34" charset="-122"/>
+                <a:cs typeface="Calibri" pitchFamily="34" charset="-120"/>
+              </a:rPr>
+              <a:t>HashMap : Hash Function + Buckets</a:t>
+            </a:r>
+            <a:endParaRPr lang="en-US" sz="2400" dirty="0"/>
+          </a:p>
+        </p:txBody>
+      </p:sp>
+      <p:sp>
+        <p:nvSpPr>
+          <p:cNvPr id="4" name="Text 2"/>
           <p:cNvSpPr/>
           <p:nvPr/>
         </p:nvSpPr>
         <p:spPr>
           <a:xfrm>
-            <a:off x="457200" y="822960"/>
-            <a:ext cx="8229600" cy="3840480"/>
-          </a:xfrm>
-          <a:prstGeom prst="rect">
-            <a:avLst/>
+            <a:off x="548640" y="1005840"/>
+            <a:ext cx="3840480" cy="3200400"/>
+          </a:xfrm>
+          <a:prstGeom prst="rect">
+            <a:avLst/>
+          </a:prstGeom>
+          <a:noFill/>
+          <a:ln/>
+        </p:spPr>
+        <p:txBody>
+          <a:bodyPr wrap="square" rtlCol="0" anchor="t"/>
+          <a:lstStyle/>
+          <a:p>
+            <a:pPr marL="342900" indent="-342900">
+              <a:buSzPct val="100000"/>
+              <a:buChar char="•"/>
+            </a:pPr>
+            <a:r>
+              <a:rPr lang="en-US" sz="1300" dirty="0">
+                <a:solidFill>
+                  <a:srgbClr val="E2E8F0"/>
+                </a:solidFill>
+                <a:latin typeface="Calibri" pitchFamily="34" charset="0"/>
+                <a:ea typeface="Calibri" pitchFamily="34" charset="-122"/>
+                <a:cs typeface="Calibri" pitchFamily="34" charset="-120"/>
+              </a:rPr>
+              <a:t>Principe : clé → hashCode() → index dans un tableau</a:t>
+            </a:r>
+            <a:endParaRPr lang="en-US" sz="1300" dirty="0"/>
+          </a:p>
+          <a:p>
+            <a:pPr marL="342900" indent="-342900">
+              <a:buSzPct val="100000"/>
+              <a:buChar char="•"/>
+            </a:pPr>
+            <a:r>
+              <a:rPr lang="en-US" sz="1300" dirty="0">
+                <a:solidFill>
+                  <a:srgbClr val="E2E8F0"/>
+                </a:solidFill>
+                <a:latin typeface="Calibri" pitchFamily="34" charset="0"/>
+                <a:ea typeface="Calibri" pitchFamily="34" charset="-122"/>
+                <a:cs typeface="Calibri" pitchFamily="34" charset="-120"/>
+              </a:rPr>
+              <a:t>Accès moyen O(1) — le plus rapide pour la recherche par clé</a:t>
+            </a:r>
+            <a:endParaRPr lang="en-US" sz="1300" dirty="0"/>
+          </a:p>
+          <a:p>
+            <a:pPr marL="342900" indent="-342900">
+              <a:buSzPct val="100000"/>
+              <a:buChar char="•"/>
+            </a:pPr>
+            <a:r>
+              <a:rPr lang="en-US" sz="1300" dirty="0">
+                <a:solidFill>
+                  <a:srgbClr val="E2E8F0"/>
+                </a:solidFill>
+                <a:latin typeface="Calibri" pitchFamily="34" charset="0"/>
+                <a:ea typeface="Calibri" pitchFamily="34" charset="-122"/>
+                <a:cs typeface="Calibri" pitchFamily="34" charset="-120"/>
+              </a:rPr>
+              <a:t>Collision : 2 clés donnent le même index → chaînage (LinkedList)</a:t>
+            </a:r>
+            <a:endParaRPr lang="en-US" sz="1300" dirty="0"/>
+          </a:p>
+          <a:p>
+            <a:pPr marL="342900" indent="-342900">
+              <a:buSzPct val="100000"/>
+              <a:buChar char="•"/>
+            </a:pPr>
+            <a:r>
+              <a:rPr lang="en-US" sz="1300" dirty="0">
+                <a:solidFill>
+                  <a:srgbClr val="E2E8F0"/>
+                </a:solidFill>
+                <a:latin typeface="Calibri" pitchFamily="34" charset="0"/>
+                <a:ea typeface="Calibri" pitchFamily="34" charset="-122"/>
+                <a:cs typeface="Calibri" pitchFamily="34" charset="-120"/>
+              </a:rPr>
+              <a:t>Pas d'ordre garanti des clés</a:t>
+            </a:r>
+            <a:endParaRPr lang="en-US" sz="1300" dirty="0"/>
+          </a:p>
+          <a:p>
+            <a:pPr marL="342900" indent="-342900">
+              <a:buSzPct val="100000"/>
+              <a:buChar char="•"/>
+            </a:pPr>
+            <a:r>
+              <a:rPr lang="en-US" sz="1300" dirty="0">
+                <a:solidFill>
+                  <a:srgbClr val="E2E8F0"/>
+                </a:solidFill>
+                <a:latin typeface="Calibri" pitchFamily="34" charset="0"/>
+                <a:ea typeface="Calibri" pitchFamily="34" charset="-122"/>
+                <a:cs typeface="Calibri" pitchFamily="34" charset="-120"/>
+              </a:rPr>
+              <a:t>Java 8+ : si bucket &gt; 8 éléments → arbre (O(log n))</a:t>
+            </a:r>
+            <a:endParaRPr lang="en-US" sz="1300" dirty="0"/>
+          </a:p>
+        </p:txBody>
+      </p:sp>
+      <p:sp>
+        <p:nvSpPr>
+          <p:cNvPr id="5" name="Shape 3"/>
+          <p:cNvSpPr/>
+          <p:nvPr/>
+        </p:nvSpPr>
+        <p:spPr>
+          <a:xfrm>
+            <a:off x="4754880" y="1005840"/>
+            <a:ext cx="4023360" cy="3200400"/>
+          </a:xfrm>
+          <a:prstGeom prst="roundRect">
+            <a:avLst>
+              <a:gd name="adj" fmla="val 2857"/>
+            </a:avLst>
           </a:prstGeom>
           <a:solidFill>
-            <a:srgbClr val="1E293B"/>
+            <a:srgbClr val="0D1117"/>
           </a:solidFill>
           <a:ln/>
         </p:spPr>
       </p:sp>
       <p:sp>
         <p:nvSpPr>
-          <p:cNvPr id="5" name="Text 3"/>
+          <p:cNvPr id="6" name="Text 4"/>
           <p:cNvSpPr/>
           <p:nvPr/>
         </p:nvSpPr>
         <p:spPr>
           <a:xfrm>
-            <a:off x="640080" y="914400"/>
-            <a:ext cx="7863840" cy="3657600"/>
+            <a:off x="4937760" y="1143000"/>
+            <a:ext cx="3657600" cy="2926080"/>
           </a:xfrm>
           <a:prstGeom prst="rect">
             <a:avLst/>
@@ -2278,461 +2112,138 @@
           <a:ln/>
         </p:spPr>
         <p:txBody>
-          <a:bodyPr wrap="square" rtlCol="0" anchor="ctr"/>
+          <a:bodyPr wrap="square" rtlCol="0" anchor="t"/>
           <a:lstStyle/>
           <a:p>
             <a:pPr indent="0" marL="0">
               <a:buNone/>
             </a:pPr>
             <a:r>
-              <a:rPr lang="en-US" sz="1100" dirty="0">
-                <a:solidFill>
-                  <a:srgbClr val="64748B"/>
+              <a:rPr lang="en-US" sz="1000" dirty="0">
+                <a:solidFill>
+                  <a:srgbClr val="A5F3FC"/>
                 </a:solidFill>
                 <a:latin typeface="Consolas" pitchFamily="34" charset="0"/>
                 <a:ea typeface="Consolas" pitchFamily="34" charset="-122"/>
                 <a:cs typeface="Consolas" pitchFamily="34" charset="-120"/>
               </a:rPr>
-              <a:t>// Principe du hachage</a:t>
-            </a:r>
-            <a:endParaRPr lang="en-US" sz="1100" dirty="0"/>
+              <a:t>// hashCode → index</a:t>
+            </a:r>
+            <a:endParaRPr lang="en-US" sz="1000" dirty="0"/>
           </a:p>
           <a:p>
             <a:pPr indent="0" marL="0">
               <a:buNone/>
             </a:pPr>
             <a:r>
-              <a:rPr lang="en-US" sz="1100" dirty="0">
-                <a:solidFill>
-                  <a:srgbClr val="64748B"/>
+              <a:rPr lang="en-US" sz="1000" dirty="0">
+                <a:solidFill>
+                  <a:srgbClr val="A5F3FC"/>
                 </a:solidFill>
                 <a:latin typeface="Consolas" pitchFamily="34" charset="0"/>
                 <a:ea typeface="Consolas" pitchFamily="34" charset="-122"/>
                 <a:cs typeface="Consolas" pitchFamily="34" charset="-120"/>
               </a:rPr>
-              <a:t>// clé → hashCode() → index dans le tableau</a:t>
-            </a:r>
-            <a:endParaRPr lang="en-US" sz="1100" dirty="0"/>
+              <a:t>int index = key.hashCode() % table.length;</a:t>
+            </a:r>
+            <a:endParaRPr lang="en-US" sz="1000" dirty="0"/>
           </a:p>
           <a:p>
             <a:pPr indent="0" marL="0">
               <a:buNone/>
             </a:pPr>
-            <a:endParaRPr lang="en-US" sz="1100" dirty="0"/>
+            <a:endParaRPr lang="en-US" sz="1000" dirty="0"/>
           </a:p>
           <a:p>
             <a:pPr indent="0" marL="0">
               <a:buNone/>
             </a:pPr>
             <a:r>
-              <a:rPr lang="en-US" sz="1100" dirty="0">
-                <a:solidFill>
-                  <a:srgbClr val="64748B"/>
+              <a:rPr lang="en-US" sz="1000" dirty="0">
+                <a:solidFill>
+                  <a:srgbClr val="A5F3FC"/>
                 </a:solidFill>
                 <a:latin typeface="Consolas" pitchFamily="34" charset="0"/>
                 <a:ea typeface="Consolas" pitchFamily="34" charset="-122"/>
                 <a:cs typeface="Consolas" pitchFamily="34" charset="-120"/>
               </a:rPr>
-              <a:t>// Exemple simplifié</a:t>
-            </a:r>
-            <a:endParaRPr lang="en-US" sz="1100" dirty="0"/>
+              <a:t>// Stockage</a:t>
+            </a:r>
+            <a:endParaRPr lang="en-US" sz="1000" dirty="0"/>
           </a:p>
           <a:p>
             <a:pPr indent="0" marL="0">
               <a:buNone/>
             </a:pPr>
             <a:r>
-              <a:rPr lang="en-US" sz="1100" dirty="0">
-                <a:solidFill>
-                  <a:srgbClr val="7C3AED"/>
+              <a:rPr lang="en-US" sz="1000" dirty="0">
+                <a:solidFill>
+                  <a:srgbClr val="A5F3FC"/>
                 </a:solidFill>
                 <a:latin typeface="Consolas" pitchFamily="34" charset="0"/>
                 <a:ea typeface="Consolas" pitchFamily="34" charset="-122"/>
                 <a:cs typeface="Consolas" pitchFamily="34" charset="-120"/>
               </a:rPr>
-              <a:t>class MaHashMap&lt;K, V&gt; {</a:t>
-            </a:r>
-            <a:endParaRPr lang="en-US" sz="1100" dirty="0"/>
+              <a:t>table[index] = new Entry(key, value);</a:t>
+            </a:r>
+            <a:endParaRPr lang="en-US" sz="1000" dirty="0"/>
           </a:p>
           <a:p>
             <a:pPr indent="0" marL="0">
               <a:buNone/>
             </a:pPr>
-            <a:r>
-              <a:rPr lang="en-US" sz="1100" dirty="0">
-                <a:solidFill>
-                  <a:srgbClr val="E2E8F0"/>
+            <a:endParaRPr lang="en-US" sz="1000" dirty="0"/>
+          </a:p>
+          <a:p>
+            <a:pPr indent="0" marL="0">
+              <a:buNone/>
+            </a:pPr>
+            <a:r>
+              <a:rPr lang="en-US" sz="1000" dirty="0">
+                <a:solidFill>
+                  <a:srgbClr val="A5F3FC"/>
                 </a:solidFill>
                 <a:latin typeface="Consolas" pitchFamily="34" charset="0"/>
                 <a:ea typeface="Consolas" pitchFamily="34" charset="-122"/>
                 <a:cs typeface="Consolas" pitchFamily="34" charset="-120"/>
               </a:rPr>
-              <a:t>    Entry&lt;K,V&gt;[] buckets = new Entry[16];</a:t>
-            </a:r>
-            <a:endParaRPr lang="en-US" sz="1100" dirty="0"/>
+              <a:t>// Collision → chaînage</a:t>
+            </a:r>
+            <a:endParaRPr lang="en-US" sz="1000" dirty="0"/>
           </a:p>
           <a:p>
             <a:pPr indent="0" marL="0">
               <a:buNone/>
             </a:pPr>
             <a:r>
-              <a:rPr lang="en-US" sz="1100" dirty="0">
-                <a:solidFill>
-                  <a:srgbClr val="E2E8F0"/>
+              <a:rPr lang="en-US" sz="1000" dirty="0">
+                <a:solidFill>
+                  <a:srgbClr val="A5F3FC"/>
                 </a:solidFill>
                 <a:latin typeface="Consolas" pitchFamily="34" charset="0"/>
                 <a:ea typeface="Consolas" pitchFamily="34" charset="-122"/>
                 <a:cs typeface="Consolas" pitchFamily="34" charset="-120"/>
               </a:rPr>
-              <a:t>    </a:t>
-            </a:r>
-            <a:endParaRPr lang="en-US" sz="1100" dirty="0"/>
+              <a:t>table[7]: Alice→Bob→null</a:t>
+            </a:r>
+            <a:endParaRPr lang="en-US" sz="1000" dirty="0"/>
           </a:p>
           <a:p>
             <a:pPr indent="0" marL="0">
               <a:buNone/>
             </a:pPr>
             <a:r>
-              <a:rPr lang="en-US" sz="1100" dirty="0">
-                <a:solidFill>
-                  <a:srgbClr val="64748B"/>
+              <a:rPr lang="en-US" sz="1000" dirty="0">
+                <a:solidFill>
+                  <a:srgbClr val="A5F3FC"/>
                 </a:solidFill>
                 <a:latin typeface="Consolas" pitchFamily="34" charset="0"/>
                 <a:ea typeface="Consolas" pitchFamily="34" charset="-122"/>
                 <a:cs typeface="Consolas" pitchFamily="34" charset="-120"/>
               </a:rPr>
-              <a:t>    // Fonction de hachage</a:t>
-            </a:r>
-            <a:endParaRPr lang="en-US" sz="1100" dirty="0"/>
-          </a:p>
-          <a:p>
-            <a:pPr indent="0" marL="0">
-              <a:buNone/>
-            </a:pPr>
-            <a:r>
-              <a:rPr lang="en-US" sz="1100" dirty="0">
-                <a:solidFill>
-                  <a:srgbClr val="E2E8F0"/>
-                </a:solidFill>
-                <a:latin typeface="Consolas" pitchFamily="34" charset="0"/>
-                <a:ea typeface="Consolas" pitchFamily="34" charset="-122"/>
-                <a:cs typeface="Consolas" pitchFamily="34" charset="-120"/>
-              </a:rPr>
-              <a:t>    int hash(K key) {</a:t>
-            </a:r>
-            <a:endParaRPr lang="en-US" sz="1100" dirty="0"/>
-          </a:p>
-          <a:p>
-            <a:pPr indent="0" marL="0">
-              <a:buNone/>
-            </a:pPr>
-            <a:r>
-              <a:rPr lang="en-US" sz="1100" dirty="0">
-                <a:solidFill>
-                  <a:srgbClr val="E2E8F0"/>
-                </a:solidFill>
-                <a:latin typeface="Consolas" pitchFamily="34" charset="0"/>
-                <a:ea typeface="Consolas" pitchFamily="34" charset="-122"/>
-                <a:cs typeface="Consolas" pitchFamily="34" charset="-120"/>
-              </a:rPr>
-              <a:t>        return Math.abs(key.hashCode() % buckets.length);</a:t>
-            </a:r>
-            <a:endParaRPr lang="en-US" sz="1100" dirty="0"/>
-          </a:p>
-          <a:p>
-            <a:pPr indent="0" marL="0">
-              <a:buNone/>
-            </a:pPr>
-            <a:r>
-              <a:rPr lang="en-US" sz="1100" dirty="0">
-                <a:solidFill>
-                  <a:srgbClr val="E2E8F0"/>
-                </a:solidFill>
-                <a:latin typeface="Consolas" pitchFamily="34" charset="0"/>
-                <a:ea typeface="Consolas" pitchFamily="34" charset="-122"/>
-                <a:cs typeface="Consolas" pitchFamily="34" charset="-120"/>
-              </a:rPr>
-              <a:t>    }</a:t>
-            </a:r>
-            <a:endParaRPr lang="en-US" sz="1100" dirty="0"/>
-          </a:p>
-          <a:p>
-            <a:pPr indent="0" marL="0">
-              <a:buNone/>
-            </a:pPr>
-            <a:r>
-              <a:rPr lang="en-US" sz="1100" dirty="0">
-                <a:solidFill>
-                  <a:srgbClr val="E2E8F0"/>
-                </a:solidFill>
-                <a:latin typeface="Consolas" pitchFamily="34" charset="0"/>
-                <a:ea typeface="Consolas" pitchFamily="34" charset="-122"/>
-                <a:cs typeface="Consolas" pitchFamily="34" charset="-120"/>
-              </a:rPr>
-              <a:t>    </a:t>
-            </a:r>
-            <a:endParaRPr lang="en-US" sz="1100" dirty="0"/>
-          </a:p>
-          <a:p>
-            <a:pPr indent="0" marL="0">
-              <a:buNone/>
-            </a:pPr>
-            <a:r>
-              <a:rPr lang="en-US" sz="1100" dirty="0">
-                <a:solidFill>
-                  <a:srgbClr val="64748B"/>
-                </a:solidFill>
-                <a:latin typeface="Consolas" pitchFamily="34" charset="0"/>
-                <a:ea typeface="Consolas" pitchFamily="34" charset="-122"/>
-                <a:cs typeface="Consolas" pitchFamily="34" charset="-120"/>
-              </a:rPr>
-              <a:t>    // put : O(1) en moyenne</a:t>
-            </a:r>
-            <a:endParaRPr lang="en-US" sz="1100" dirty="0"/>
-          </a:p>
-          <a:p>
-            <a:pPr indent="0" marL="0">
-              <a:buNone/>
-            </a:pPr>
-            <a:r>
-              <a:rPr lang="en-US" sz="1100" dirty="0">
-                <a:solidFill>
-                  <a:srgbClr val="E2E8F0"/>
-                </a:solidFill>
-                <a:latin typeface="Consolas" pitchFamily="34" charset="0"/>
-                <a:ea typeface="Consolas" pitchFamily="34" charset="-122"/>
-                <a:cs typeface="Consolas" pitchFamily="34" charset="-120"/>
-              </a:rPr>
-              <a:t>    void put(K key, V value) {</a:t>
-            </a:r>
-            <a:endParaRPr lang="en-US" sz="1100" dirty="0"/>
-          </a:p>
-          <a:p>
-            <a:pPr indent="0" marL="0">
-              <a:buNone/>
-            </a:pPr>
-            <a:r>
-              <a:rPr lang="en-US" sz="1100" dirty="0">
-                <a:solidFill>
-                  <a:srgbClr val="E2E8F0"/>
-                </a:solidFill>
-                <a:latin typeface="Consolas" pitchFamily="34" charset="0"/>
-                <a:ea typeface="Consolas" pitchFamily="34" charset="-122"/>
-                <a:cs typeface="Consolas" pitchFamily="34" charset="-120"/>
-              </a:rPr>
-              <a:t>        int index = hash(key);</a:t>
-            </a:r>
-            <a:endParaRPr lang="en-US" sz="1100" dirty="0"/>
-          </a:p>
-          <a:p>
-            <a:pPr indent="0" marL="0">
-              <a:buNone/>
-            </a:pPr>
-            <a:r>
-              <a:rPr lang="en-US" sz="1100" dirty="0">
-                <a:solidFill>
-                  <a:srgbClr val="E2E8F0"/>
-                </a:solidFill>
-                <a:latin typeface="Consolas" pitchFamily="34" charset="0"/>
-                <a:ea typeface="Consolas" pitchFamily="34" charset="-122"/>
-                <a:cs typeface="Consolas" pitchFamily="34" charset="-120"/>
-              </a:rPr>
-              <a:t>        buckets[index] = new Entry&lt;&gt;(key, value);</a:t>
-            </a:r>
-            <a:endParaRPr lang="en-US" sz="1100" dirty="0"/>
-          </a:p>
-          <a:p>
-            <a:pPr indent="0" marL="0">
-              <a:buNone/>
-            </a:pPr>
-            <a:r>
-              <a:rPr lang="en-US" sz="1100" dirty="0">
-                <a:solidFill>
-                  <a:srgbClr val="64748B"/>
-                </a:solidFill>
-                <a:latin typeface="Consolas" pitchFamily="34" charset="0"/>
-                <a:ea typeface="Consolas" pitchFamily="34" charset="-122"/>
-                <a:cs typeface="Consolas" pitchFamily="34" charset="-120"/>
-              </a:rPr>
-              <a:t>        // Collision ? → chaînage (LinkedList dans le bucket)</a:t>
-            </a:r>
-            <a:endParaRPr lang="en-US" sz="1100" dirty="0"/>
-          </a:p>
-          <a:p>
-            <a:pPr indent="0" marL="0">
-              <a:buNone/>
-            </a:pPr>
-            <a:r>
-              <a:rPr lang="en-US" sz="1100" dirty="0">
-                <a:solidFill>
-                  <a:srgbClr val="E2E8F0"/>
-                </a:solidFill>
-                <a:latin typeface="Consolas" pitchFamily="34" charset="0"/>
-                <a:ea typeface="Consolas" pitchFamily="34" charset="-122"/>
-                <a:cs typeface="Consolas" pitchFamily="34" charset="-120"/>
-              </a:rPr>
-              <a:t>    }</a:t>
-            </a:r>
-            <a:endParaRPr lang="en-US" sz="1100" dirty="0"/>
-          </a:p>
-          <a:p>
-            <a:pPr indent="0" marL="0">
-              <a:buNone/>
-            </a:pPr>
-            <a:r>
-              <a:rPr lang="en-US" sz="1100" dirty="0">
-                <a:solidFill>
-                  <a:srgbClr val="E2E8F0"/>
-                </a:solidFill>
-                <a:latin typeface="Consolas" pitchFamily="34" charset="0"/>
-                <a:ea typeface="Consolas" pitchFamily="34" charset="-122"/>
-                <a:cs typeface="Consolas" pitchFamily="34" charset="-120"/>
-              </a:rPr>
-              <a:t>    </a:t>
-            </a:r>
-            <a:endParaRPr lang="en-US" sz="1100" dirty="0"/>
-          </a:p>
-          <a:p>
-            <a:pPr indent="0" marL="0">
-              <a:buNone/>
-            </a:pPr>
-            <a:r>
-              <a:rPr lang="en-US" sz="1100" dirty="0">
-                <a:solidFill>
-                  <a:srgbClr val="64748B"/>
-                </a:solidFill>
-                <a:latin typeface="Consolas" pitchFamily="34" charset="0"/>
-                <a:ea typeface="Consolas" pitchFamily="34" charset="-122"/>
-                <a:cs typeface="Consolas" pitchFamily="34" charset="-120"/>
-              </a:rPr>
-              <a:t>    // get : O(1) en moyenne</a:t>
-            </a:r>
-            <a:endParaRPr lang="en-US" sz="1100" dirty="0"/>
-          </a:p>
-          <a:p>
-            <a:pPr indent="0" marL="0">
-              <a:buNone/>
-            </a:pPr>
-            <a:r>
-              <a:rPr lang="en-US" sz="1100" dirty="0">
-                <a:solidFill>
-                  <a:srgbClr val="E2E8F0"/>
-                </a:solidFill>
-                <a:latin typeface="Consolas" pitchFamily="34" charset="0"/>
-                <a:ea typeface="Consolas" pitchFamily="34" charset="-122"/>
-                <a:cs typeface="Consolas" pitchFamily="34" charset="-120"/>
-              </a:rPr>
-              <a:t>    V get(K key) {</a:t>
-            </a:r>
-            <a:endParaRPr lang="en-US" sz="1100" dirty="0"/>
-          </a:p>
-          <a:p>
-            <a:pPr indent="0" marL="0">
-              <a:buNone/>
-            </a:pPr>
-            <a:r>
-              <a:rPr lang="en-US" sz="1100" dirty="0">
-                <a:solidFill>
-                  <a:srgbClr val="E2E8F0"/>
-                </a:solidFill>
-                <a:latin typeface="Consolas" pitchFamily="34" charset="0"/>
-                <a:ea typeface="Consolas" pitchFamily="34" charset="-122"/>
-                <a:cs typeface="Consolas" pitchFamily="34" charset="-120"/>
-              </a:rPr>
-              <a:t>        int index = hash(key);</a:t>
-            </a:r>
-            <a:endParaRPr lang="en-US" sz="1100" dirty="0"/>
-          </a:p>
-          <a:p>
-            <a:pPr indent="0" marL="0">
-              <a:buNone/>
-            </a:pPr>
-            <a:r>
-              <a:rPr lang="en-US" sz="1100" dirty="0">
-                <a:solidFill>
-                  <a:srgbClr val="E2E8F0"/>
-                </a:solidFill>
-                <a:latin typeface="Consolas" pitchFamily="34" charset="0"/>
-                <a:ea typeface="Consolas" pitchFamily="34" charset="-122"/>
-                <a:cs typeface="Consolas" pitchFamily="34" charset="-120"/>
-              </a:rPr>
-              <a:t>        return buckets[index].value;</a:t>
-            </a:r>
-            <a:endParaRPr lang="en-US" sz="1100" dirty="0"/>
-          </a:p>
-          <a:p>
-            <a:pPr indent="0" marL="0">
-              <a:buNone/>
-            </a:pPr>
-            <a:r>
-              <a:rPr lang="en-US" sz="1100" dirty="0">
-                <a:solidFill>
-                  <a:srgbClr val="E2E8F0"/>
-                </a:solidFill>
-                <a:latin typeface="Consolas" pitchFamily="34" charset="0"/>
-                <a:ea typeface="Consolas" pitchFamily="34" charset="-122"/>
-                <a:cs typeface="Consolas" pitchFamily="34" charset="-120"/>
-              </a:rPr>
-              <a:t>    }</a:t>
-            </a:r>
-            <a:endParaRPr lang="en-US" sz="1100" dirty="0"/>
-          </a:p>
-          <a:p>
-            <a:pPr indent="0" marL="0">
-              <a:buNone/>
-            </a:pPr>
-            <a:r>
-              <a:rPr lang="en-US" sz="1100" dirty="0">
-                <a:solidFill>
-                  <a:srgbClr val="E2E8F0"/>
-                </a:solidFill>
-                <a:latin typeface="Consolas" pitchFamily="34" charset="0"/>
-                <a:ea typeface="Consolas" pitchFamily="34" charset="-122"/>
-                <a:cs typeface="Consolas" pitchFamily="34" charset="-120"/>
-              </a:rPr>
-              <a:t>}</a:t>
-            </a:r>
-            <a:endParaRPr lang="en-US" sz="1100" dirty="0"/>
-          </a:p>
-          <a:p>
-            <a:pPr indent="0" marL="0">
-              <a:buNone/>
-            </a:pPr>
-            <a:endParaRPr lang="en-US" sz="1100" dirty="0"/>
-          </a:p>
-          <a:p>
-            <a:pPr indent="0" marL="0">
-              <a:buNone/>
-            </a:pPr>
-            <a:r>
-              <a:rPr lang="en-US" sz="1100" dirty="0">
-                <a:solidFill>
-                  <a:srgbClr val="64748B"/>
-                </a:solidFill>
-                <a:latin typeface="Consolas" pitchFamily="34" charset="0"/>
-                <a:ea typeface="Consolas" pitchFamily="34" charset="-122"/>
-                <a:cs typeface="Consolas" pitchFamily="34" charset="-120"/>
-              </a:rPr>
-              <a:t>// Collision : deux clés → même index</a:t>
-            </a:r>
-            <a:endParaRPr lang="en-US" sz="1100" dirty="0"/>
-          </a:p>
-          <a:p>
-            <a:pPr indent="0" marL="0">
-              <a:buNone/>
-            </a:pPr>
-            <a:r>
-              <a:rPr lang="en-US" sz="1100" dirty="0">
-                <a:solidFill>
-                  <a:srgbClr val="64748B"/>
-                </a:solidFill>
-                <a:latin typeface="Consolas" pitchFamily="34" charset="0"/>
-                <a:ea typeface="Consolas" pitchFamily="34" charset="-122"/>
-                <a:cs typeface="Consolas" pitchFamily="34" charset="-120"/>
-              </a:rPr>
-              <a:t>// Solution : chaque bucket contient une liste</a:t>
-            </a:r>
-            <a:endParaRPr lang="en-US" sz="1100" dirty="0"/>
+              <a:t>//    (même hash % 16 = 7)</a:t>
+            </a:r>
+            <a:endParaRPr lang="en-US" sz="1000" dirty="0"/>
           </a:p>
         </p:txBody>
       </p:sp>
@@ -2750,7 +2261,7 @@
     <p:bg>
       <p:bgPr>
         <a:solidFill>
-          <a:srgbClr val="F8FAFC"/>
+          <a:srgbClr val="1A0D00"/>
         </a:solidFill>
       </p:bgPr>
     </p:bg>
@@ -2777,13 +2288,13 @@
         <p:spPr>
           <a:xfrm>
             <a:off x="0" y="0"/>
-            <a:ext cx="109728" cy="5143500"/>
+            <a:ext cx="9144000" cy="54864"/>
           </a:xfrm>
           <a:prstGeom prst="rect">
             <a:avLst/>
           </a:prstGeom>
           <a:solidFill>
-            <a:srgbClr val="DC2626"/>
+            <a:srgbClr val="F97316"/>
           </a:solidFill>
           <a:ln/>
         </p:spPr>
@@ -2796,7 +2307,7 @@
         </p:nvSpPr>
         <p:spPr>
           <a:xfrm>
-            <a:off x="457200" y="274320"/>
+            <a:off x="548640" y="274320"/>
             <a:ext cx="8229600" cy="548640"/>
           </a:xfrm>
           <a:prstGeom prst="rect">
@@ -2813,17 +2324,17 @@
               <a:buNone/>
             </a:pPr>
             <a:r>
-              <a:rPr lang="en-US" sz="2600" b="1" dirty="0">
-                <a:solidFill>
-                  <a:srgbClr val="1B2A4A"/>
-                </a:solidFill>
-                <a:latin typeface="Trebuchet MS" pitchFamily="34" charset="0"/>
-                <a:ea typeface="Trebuchet MS" pitchFamily="34" charset="-122"/>
-                <a:cs typeface="Trebuchet MS" pitchFamily="34" charset="-120"/>
-              </a:rPr>
-              <a:t>LinkedList vs ArrayList vs HashMap</a:t>
-            </a:r>
-            <a:endParaRPr lang="en-US" sz="2600" dirty="0"/>
+              <a:rPr lang="en-US" sz="2400" b="1" dirty="0">
+                <a:solidFill>
+                  <a:srgbClr val="FFFFFF"/>
+                </a:solidFill>
+                <a:latin typeface="Calibri" pitchFamily="34" charset="0"/>
+                <a:ea typeface="Calibri" pitchFamily="34" charset="-122"/>
+                <a:cs typeface="Calibri" pitchFamily="34" charset="-120"/>
+              </a:rPr>
+              <a:t>Comparaison LinkedList vs ArrayList</a:t>
+            </a:r>
+            <a:endParaRPr lang="en-US" sz="2400" dirty="0"/>
           </a:p>
         </p:txBody>
       </p:sp>
@@ -2835,8 +2346,8 @@
         </p:nvSpPr>
         <p:spPr>
           <a:xfrm>
-            <a:off x="640080" y="1005840"/>
-            <a:ext cx="7772400" cy="457200"/>
+            <a:off x="548640" y="1005840"/>
+            <a:ext cx="8046720" cy="3657600"/>
           </a:xfrm>
           <a:prstGeom prst="rect">
             <a:avLst/>
@@ -2845,223 +2356,110 @@
           <a:ln/>
         </p:spPr>
         <p:txBody>
-          <a:bodyPr wrap="square" rtlCol="0" anchor="ctr"/>
+          <a:bodyPr wrap="square" rtlCol="0" anchor="t"/>
           <a:lstStyle/>
           <a:p>
             <a:pPr marL="342900" indent="-342900">
+              <a:lnSpc>
+                <a:spcPct val="130000"/>
+              </a:lnSpc>
               <a:buSzPct val="100000"/>
               <a:buChar char="•"/>
             </a:pPr>
             <a:r>
               <a:rPr lang="en-US" sz="1400" dirty="0">
                 <a:solidFill>
-                  <a:srgbClr val="334155"/>
+                  <a:srgbClr val="E2E8F0"/>
                 </a:solidFill>
                 <a:latin typeface="Calibri" pitchFamily="34" charset="0"/>
                 <a:ea typeface="Calibri" pitchFamily="34" charset="-122"/>
                 <a:cs typeface="Calibri" pitchFamily="34" charset="-120"/>
               </a:rPr>
-              <a:t>ArrayList : accès O(1) par index, insertion O(n) au milieu → tableau dynamique</a:t>
+              <a:t>get(index) : ArrayList O(1), LinkedList O(n)</a:t>
             </a:r>
             <a:endParaRPr lang="en-US" sz="1400" dirty="0"/>
           </a:p>
-        </p:txBody>
-      </p:sp>
-      <p:sp>
-        <p:nvSpPr>
-          <p:cNvPr id="5" name="Text 3"/>
-          <p:cNvSpPr/>
-          <p:nvPr/>
-        </p:nvSpPr>
-        <p:spPr>
-          <a:xfrm>
-            <a:off x="640080" y="1554480"/>
-            <a:ext cx="7772400" cy="457200"/>
-          </a:xfrm>
-          <a:prstGeom prst="rect">
-            <a:avLst/>
-          </a:prstGeom>
-          <a:noFill/>
-          <a:ln/>
-        </p:spPr>
-        <p:txBody>
-          <a:bodyPr wrap="square" rtlCol="0" anchor="ctr"/>
-          <a:lstStyle/>
           <a:p>
             <a:pPr marL="342900" indent="-342900">
+              <a:lnSpc>
+                <a:spcPct val="130000"/>
+              </a:lnSpc>
               <a:buSzPct val="100000"/>
               <a:buChar char="•"/>
             </a:pPr>
             <a:r>
               <a:rPr lang="en-US" sz="1400" dirty="0">
                 <a:solidFill>
-                  <a:srgbClr val="334155"/>
+                  <a:srgbClr val="E2E8F0"/>
                 </a:solidFill>
                 <a:latin typeface="Calibri" pitchFamily="34" charset="0"/>
                 <a:ea typeface="Calibri" pitchFamily="34" charset="-122"/>
                 <a:cs typeface="Calibri" pitchFamily="34" charset="-120"/>
               </a:rPr>
-              <a:t>LinkedList : insertion O(1) en tête/queue, accès O(n) par index → noeuds chaînés</a:t>
+              <a:t>add(début) : LinkedList O(1), ArrayList O(n)</a:t>
             </a:r>
             <a:endParaRPr lang="en-US" sz="1400" dirty="0"/>
           </a:p>
-        </p:txBody>
-      </p:sp>
-      <p:sp>
-        <p:nvSpPr>
-          <p:cNvPr id="6" name="Text 4"/>
-          <p:cNvSpPr/>
-          <p:nvPr/>
-        </p:nvSpPr>
-        <p:spPr>
-          <a:xfrm>
-            <a:off x="640080" y="2103120"/>
-            <a:ext cx="7772400" cy="457200"/>
-          </a:xfrm>
-          <a:prstGeom prst="rect">
-            <a:avLst/>
-          </a:prstGeom>
-          <a:noFill/>
-          <a:ln/>
-        </p:spPr>
-        <p:txBody>
-          <a:bodyPr wrap="square" rtlCol="0" anchor="ctr"/>
-          <a:lstStyle/>
           <a:p>
             <a:pPr marL="342900" indent="-342900">
+              <a:lnSpc>
+                <a:spcPct val="130000"/>
+              </a:lnSpc>
               <a:buSzPct val="100000"/>
               <a:buChar char="•"/>
             </a:pPr>
             <a:r>
               <a:rPr lang="en-US" sz="1400" dirty="0">
                 <a:solidFill>
-                  <a:srgbClr val="334155"/>
+                  <a:srgbClr val="E2E8F0"/>
                 </a:solidFill>
                 <a:latin typeface="Calibri" pitchFamily="34" charset="0"/>
                 <a:ea typeface="Calibri" pitchFamily="34" charset="-122"/>
                 <a:cs typeface="Calibri" pitchFamily="34" charset="-120"/>
               </a:rPr>
-              <a:t>HashMap : accès O(1) par clé, pas d'ordre → table de hachage avec buckets</a:t>
+              <a:t>add(fin) : Les deux O(1) amorti</a:t>
             </a:r>
             <a:endParaRPr lang="en-US" sz="1400" dirty="0"/>
           </a:p>
-        </p:txBody>
-      </p:sp>
-      <p:sp>
-        <p:nvSpPr>
-          <p:cNvPr id="7" name="Text 5"/>
-          <p:cNvSpPr/>
-          <p:nvPr/>
-        </p:nvSpPr>
-        <p:spPr>
-          <a:xfrm>
-            <a:off x="640080" y="2651760"/>
-            <a:ext cx="7772400" cy="457200"/>
-          </a:xfrm>
-          <a:prstGeom prst="rect">
-            <a:avLst/>
-          </a:prstGeom>
-          <a:noFill/>
-          <a:ln/>
-        </p:spPr>
-        <p:txBody>
-          <a:bodyPr wrap="square" rtlCol="0" anchor="ctr"/>
-          <a:lstStyle/>
           <a:p>
             <a:pPr marL="342900" indent="-342900">
+              <a:lnSpc>
+                <a:spcPct val="130000"/>
+              </a:lnSpc>
               <a:buSzPct val="100000"/>
               <a:buChar char="•"/>
             </a:pPr>
             <a:r>
               <a:rPr lang="en-US" sz="1400" dirty="0">
                 <a:solidFill>
-                  <a:srgbClr val="334155"/>
+                  <a:srgbClr val="E2E8F0"/>
                 </a:solidFill>
                 <a:latin typeface="Calibri" pitchFamily="34" charset="0"/>
                 <a:ea typeface="Calibri" pitchFamily="34" charset="-122"/>
                 <a:cs typeface="Calibri" pitchFamily="34" charset="-120"/>
               </a:rPr>
-              <a:t>LinkedList quand : beaucoup d'insertions/suppressions, peu d'accès par index</a:t>
+              <a:t>Mémoire : LinkedList plus gourmande (pointeurs)</a:t>
             </a:r>
             <a:endParaRPr lang="en-US" sz="1400" dirty="0"/>
           </a:p>
-        </p:txBody>
-      </p:sp>
-      <p:sp>
-        <p:nvSpPr>
-          <p:cNvPr id="8" name="Text 6"/>
-          <p:cNvSpPr/>
-          <p:nvPr/>
-        </p:nvSpPr>
-        <p:spPr>
-          <a:xfrm>
-            <a:off x="640080" y="3200400"/>
-            <a:ext cx="7772400" cy="457200"/>
-          </a:xfrm>
-          <a:prstGeom prst="rect">
-            <a:avLst/>
-          </a:prstGeom>
-          <a:noFill/>
-          <a:ln/>
-        </p:spPr>
-        <p:txBody>
-          <a:bodyPr wrap="square" rtlCol="0" anchor="ctr"/>
-          <a:lstStyle/>
           <a:p>
             <a:pPr marL="342900" indent="-342900">
+              <a:lnSpc>
+                <a:spcPct val="130000"/>
+              </a:lnSpc>
               <a:buSzPct val="100000"/>
               <a:buChar char="•"/>
             </a:pPr>
             <a:r>
               <a:rPr lang="en-US" sz="1400" dirty="0">
                 <a:solidFill>
-                  <a:srgbClr val="334155"/>
+                  <a:srgbClr val="E2E8F0"/>
                 </a:solidFill>
                 <a:latin typeface="Calibri" pitchFamily="34" charset="0"/>
                 <a:ea typeface="Calibri" pitchFamily="34" charset="-122"/>
                 <a:cs typeface="Calibri" pitchFamily="34" charset="-120"/>
               </a:rPr>
-              <a:t>HashMap quand : recherche rapide par clé unique (email, ID, nom...)</a:t>
-            </a:r>
-            <a:endParaRPr lang="en-US" sz="1400" dirty="0"/>
-          </a:p>
-        </p:txBody>
-      </p:sp>
-      <p:sp>
-        <p:nvSpPr>
-          <p:cNvPr id="9" name="Text 7"/>
-          <p:cNvSpPr/>
-          <p:nvPr/>
-        </p:nvSpPr>
-        <p:spPr>
-          <a:xfrm>
-            <a:off x="640080" y="3749040"/>
-            <a:ext cx="7772400" cy="457200"/>
-          </a:xfrm>
-          <a:prstGeom prst="rect">
-            <a:avLst/>
-          </a:prstGeom>
-          <a:noFill/>
-          <a:ln/>
-        </p:spPr>
-        <p:txBody>
-          <a:bodyPr wrap="square" rtlCol="0" anchor="ctr"/>
-          <a:lstStyle/>
-          <a:p>
-            <a:pPr marL="342900" indent="-342900">
-              <a:buSzPct val="100000"/>
-              <a:buChar char="•"/>
-            </a:pPr>
-            <a:r>
-              <a:rPr lang="en-US" sz="1400" dirty="0">
-                <a:solidFill>
-                  <a:srgbClr val="334155"/>
-                </a:solidFill>
-                <a:latin typeface="Calibri" pitchFamily="34" charset="0"/>
-                <a:ea typeface="Calibri" pitchFamily="34" charset="-122"/>
-                <a:cs typeface="Calibri" pitchFamily="34" charset="-120"/>
-              </a:rPr>
-              <a:t>Exercice du chapitre : gestion de contacts (LinkedList) + annuaire (HashMap)</a:t>
+              <a:t>Choix : lectures fréquentes → ArrayList, insertions fréquentes → LinkedList</a:t>
             </a:r>
             <a:endParaRPr lang="en-US" sz="1400" dirty="0"/>
           </a:p>
@@ -3081,7 +2479,7 @@
     <p:bg>
       <p:bgPr>
         <a:solidFill>
-          <a:srgbClr val="0F172A"/>
+          <a:srgbClr val="1A0D00"/>
         </a:solidFill>
       </p:bgPr>
     </p:bg>
@@ -3101,62 +2499,64 @@
       </p:grpSpPr>
       <p:sp>
         <p:nvSpPr>
-          <p:cNvPr id="2" name="Shape 0"/>
+          <p:cNvPr id="2" name="Text 0"/>
           <p:cNvSpPr/>
           <p:nvPr/>
         </p:nvSpPr>
         <p:spPr>
           <a:xfrm>
-            <a:off x="0" y="0"/>
-            <a:ext cx="9144000" cy="73152"/>
-          </a:xfrm>
-          <a:prstGeom prst="rect">
-            <a:avLst/>
+            <a:off x="548640" y="274320"/>
+            <a:ext cx="8229600" cy="548640"/>
+          </a:xfrm>
+          <a:prstGeom prst="rect">
+            <a:avLst/>
+          </a:prstGeom>
+          <a:noFill/>
+          <a:ln/>
+        </p:spPr>
+        <p:txBody>
+          <a:bodyPr wrap="square" rtlCol="0" anchor="ctr"/>
+          <a:lstStyle/>
+          <a:p>
+            <a:pPr indent="0" marL="0">
+              <a:buNone/>
+            </a:pPr>
+            <a:r>
+              <a:rPr lang="en-US" sz="2800" b="1" dirty="0">
+                <a:solidFill>
+                  <a:srgbClr val="FFFFFF"/>
+                </a:solidFill>
+                <a:latin typeface="Calibri" pitchFamily="34" charset="0"/>
+                <a:ea typeface="Calibri" pitchFamily="34" charset="-122"/>
+                <a:cs typeface="Calibri" pitchFamily="34" charset="-120"/>
+              </a:rPr>
+              <a:t>Récapitulatif</a:t>
+            </a:r>
+            <a:endParaRPr lang="en-US" sz="2800" dirty="0"/>
+          </a:p>
+        </p:txBody>
+      </p:sp>
+      <p:sp>
+        <p:nvSpPr>
+          <p:cNvPr id="3" name="Shape 1"/>
+          <p:cNvSpPr/>
+          <p:nvPr/>
+        </p:nvSpPr>
+        <p:spPr>
+          <a:xfrm>
+            <a:off x="548640" y="1097280"/>
+            <a:ext cx="2621280" cy="3200400"/>
+          </a:xfrm>
+          <a:prstGeom prst="roundRect">
+            <a:avLst>
+              <a:gd name="adj" fmla="val 3488"/>
+            </a:avLst>
           </a:prstGeom>
           <a:solidFill>
-            <a:srgbClr val="DC2626"/>
+            <a:srgbClr val="2D1A00"/>
           </a:solidFill>
           <a:ln/>
         </p:spPr>
-      </p:sp>
-      <p:sp>
-        <p:nvSpPr>
-          <p:cNvPr id="3" name="Text 1"/>
-          <p:cNvSpPr/>
-          <p:nvPr/>
-        </p:nvSpPr>
-        <p:spPr>
-          <a:xfrm>
-            <a:off x="457200" y="182880"/>
-            <a:ext cx="7315200" cy="457200"/>
-          </a:xfrm>
-          <a:prstGeom prst="rect">
-            <a:avLst/>
-          </a:prstGeom>
-          <a:noFill/>
-          <a:ln/>
-        </p:spPr>
-        <p:txBody>
-          <a:bodyPr wrap="square" rtlCol="0" anchor="ctr"/>
-          <a:lstStyle/>
-          <a:p>
-            <a:pPr indent="0" marL="0">
-              <a:buNone/>
-            </a:pPr>
-            <a:r>
-              <a:rPr lang="en-US" sz="2200" b="1" dirty="0">
-                <a:solidFill>
-                  <a:srgbClr val="DC2626"/>
-                </a:solidFill>
-                <a:latin typeface="Trebuchet MS" pitchFamily="34" charset="0"/>
-                <a:ea typeface="Trebuchet MS" pitchFamily="34" charset="-122"/>
-                <a:cs typeface="Trebuchet MS" pitchFamily="34" charset="-120"/>
-              </a:rPr>
-              <a:t>NOTES ENSEIGNANT — Ch.8 P4a LinkedList+HashMap</a:t>
-            </a:r>
-            <a:endParaRPr lang="en-US" sz="2200" dirty="0"/>
-          </a:p>
-        </p:txBody>
       </p:sp>
       <p:sp>
         <p:nvSpPr>
@@ -3166,8 +2566,8 @@
         </p:nvSpPr>
         <p:spPr>
           <a:xfrm>
-            <a:off x="457200" y="731520"/>
-            <a:ext cx="8229600" cy="4114800"/>
+            <a:off x="548640" y="1280160"/>
+            <a:ext cx="2621280" cy="457200"/>
           </a:xfrm>
           <a:prstGeom prst="rect">
             <a:avLst/>
@@ -3179,112 +2579,319 @@
           <a:bodyPr wrap="square" rtlCol="0" anchor="ctr"/>
           <a:lstStyle/>
           <a:p>
-            <a:pPr indent="0" marL="0">
-              <a:buNone/>
-            </a:pPr>
-            <a:r>
-              <a:rPr lang="en-US" sz="1500" b="1" dirty="0">
-                <a:solidFill>
-                  <a:srgbClr val="00A896"/>
-                </a:solidFill>
-                <a:latin typeface="Trebuchet MS" pitchFamily="34" charset="0"/>
-                <a:ea typeface="Trebuchet MS" pitchFamily="34" charset="-122"/>
-                <a:cs typeface="Trebuchet MS" pitchFamily="34" charset="-120"/>
-              </a:rPr>
-              <a:t>Plan de séance :</a:t>
-            </a:r>
-            <a:endParaRPr lang="en-US" sz="1500" dirty="0"/>
-          </a:p>
-          <a:p>
-            <a:pPr indent="0" marL="0">
-              <a:buNone/>
-            </a:pPr>
-            <a:endParaRPr lang="en-US" sz="1500" dirty="0"/>
-          </a:p>
-          <a:p>
-            <a:pPr marL="342900" indent="-342900">
-              <a:buSzPct val="100000"/>
-              <a:buChar char="•"/>
-            </a:pPr>
-            <a:r>
-              <a:rPr lang="en-US" sz="1200" dirty="0">
-                <a:solidFill>
-                  <a:srgbClr val="E2E8F0"/>
+            <a:pPr algn="ctr" indent="0" marL="0">
+              <a:buNone/>
+            </a:pPr>
+            <a:r>
+              <a:rPr lang="en-US" sz="2800" dirty="0">
+                <a:solidFill>
+                  <a:srgbClr val="000000"/>
+                </a:solidFill>
+              </a:rPr>
+              <a:t>🔗</a:t>
+            </a:r>
+            <a:endParaRPr lang="en-US" sz="2800" dirty="0"/>
+          </a:p>
+        </p:txBody>
+      </p:sp>
+      <p:sp>
+        <p:nvSpPr>
+          <p:cNvPr id="5" name="Text 3"/>
+          <p:cNvSpPr/>
+          <p:nvPr/>
+        </p:nvSpPr>
+        <p:spPr>
+          <a:xfrm>
+            <a:off x="685800" y="1828800"/>
+            <a:ext cx="2346960" cy="365760"/>
+          </a:xfrm>
+          <a:prstGeom prst="rect">
+            <a:avLst/>
+          </a:prstGeom>
+          <a:noFill/>
+          <a:ln/>
+        </p:spPr>
+        <p:txBody>
+          <a:bodyPr wrap="square" rtlCol="0" anchor="ctr"/>
+          <a:lstStyle/>
+          <a:p>
+            <a:pPr algn="ctr" indent="0" marL="0">
+              <a:buNone/>
+            </a:pPr>
+            <a:r>
+              <a:rPr lang="en-US" sz="1300" b="1" dirty="0">
+                <a:solidFill>
+                  <a:srgbClr val="F97316"/>
                 </a:solidFill>
                 <a:latin typeface="Calibri" pitchFamily="34" charset="0"/>
                 <a:ea typeface="Calibri" pitchFamily="34" charset="-122"/>
                 <a:cs typeface="Calibri" pitchFamily="34" charset="-120"/>
               </a:rPr>
-              <a:t>P1 : LinkedList — structure interne, noeuds, pointeurs. Dessiner au tableau.</a:t>
-            </a:r>
-            <a:endParaRPr lang="en-US" sz="1500" dirty="0"/>
-          </a:p>
-          <a:p>
-            <a:pPr marL="342900" indent="-342900">
-              <a:buSzPct val="100000"/>
-              <a:buChar char="•"/>
-            </a:pPr>
-            <a:r>
-              <a:rPr lang="en-US" sz="1200" dirty="0">
-                <a:solidFill>
-                  <a:srgbClr val="E2E8F0"/>
+              <a:t>LinkedList</a:t>
+            </a:r>
+            <a:endParaRPr lang="en-US" sz="1300" dirty="0"/>
+          </a:p>
+        </p:txBody>
+      </p:sp>
+      <p:sp>
+        <p:nvSpPr>
+          <p:cNvPr id="6" name="Text 4"/>
+          <p:cNvSpPr/>
+          <p:nvPr/>
+        </p:nvSpPr>
+        <p:spPr>
+          <a:xfrm>
+            <a:off x="685800" y="2286000"/>
+            <a:ext cx="2346960" cy="1828800"/>
+          </a:xfrm>
+          <a:prstGeom prst="rect">
+            <a:avLst/>
+          </a:prstGeom>
+          <a:noFill/>
+          <a:ln/>
+        </p:spPr>
+        <p:txBody>
+          <a:bodyPr wrap="square" rtlCol="0" anchor="t"/>
+          <a:lstStyle/>
+          <a:p>
+            <a:pPr algn="ctr" indent="0" marL="0">
+              <a:buNone/>
+            </a:pPr>
+            <a:r>
+              <a:rPr lang="en-US" sz="1100" dirty="0">
+                <a:solidFill>
+                  <a:srgbClr val="94A3B8"/>
                 </a:solidFill>
                 <a:latin typeface="Calibri" pitchFamily="34" charset="0"/>
                 <a:ea typeface="Calibri" pitchFamily="34" charset="-122"/>
                 <a:cs typeface="Calibri" pitchFamily="34" charset="-120"/>
               </a:rPr>
-              <a:t>P2 : HashMap — hash function, buckets, collisions. Live coding.</a:t>
-            </a:r>
-            <a:endParaRPr lang="en-US" sz="1500" dirty="0"/>
-          </a:p>
-          <a:p>
-            <a:pPr marL="342900" indent="-342900">
-              <a:buSzPct val="100000"/>
-              <a:buChar char="•"/>
-            </a:pPr>
-            <a:r>
-              <a:rPr lang="en-US" sz="1200" dirty="0">
-                <a:solidFill>
-                  <a:srgbClr val="E2E8F0"/>
+              <a:t>Nœuds chaînés, insertion O(1), accès O(n)</a:t>
+            </a:r>
+            <a:endParaRPr lang="en-US" sz="1100" dirty="0"/>
+          </a:p>
+        </p:txBody>
+      </p:sp>
+      <p:sp>
+        <p:nvSpPr>
+          <p:cNvPr id="7" name="Shape 5"/>
+          <p:cNvSpPr/>
+          <p:nvPr/>
+        </p:nvSpPr>
+        <p:spPr>
+          <a:xfrm>
+            <a:off x="3352800" y="1097280"/>
+            <a:ext cx="2621280" cy="3200400"/>
+          </a:xfrm>
+          <a:prstGeom prst="roundRect">
+            <a:avLst>
+              <a:gd name="adj" fmla="val 3488"/>
+            </a:avLst>
+          </a:prstGeom>
+          <a:solidFill>
+            <a:srgbClr val="2D1A00"/>
+          </a:solidFill>
+          <a:ln/>
+        </p:spPr>
+      </p:sp>
+      <p:sp>
+        <p:nvSpPr>
+          <p:cNvPr id="8" name="Text 6"/>
+          <p:cNvSpPr/>
+          <p:nvPr/>
+        </p:nvSpPr>
+        <p:spPr>
+          <a:xfrm>
+            <a:off x="3352800" y="1280160"/>
+            <a:ext cx="2621280" cy="457200"/>
+          </a:xfrm>
+          <a:prstGeom prst="rect">
+            <a:avLst/>
+          </a:prstGeom>
+          <a:noFill/>
+          <a:ln/>
+        </p:spPr>
+        <p:txBody>
+          <a:bodyPr wrap="square" rtlCol="0" anchor="ctr"/>
+          <a:lstStyle/>
+          <a:p>
+            <a:pPr algn="ctr" indent="0" marL="0">
+              <a:buNone/>
+            </a:pPr>
+            <a:r>
+              <a:rPr lang="en-US" sz="2800" dirty="0">
+                <a:solidFill>
+                  <a:srgbClr val="000000"/>
+                </a:solidFill>
+              </a:rPr>
+              <a:t>#️⃣</a:t>
+            </a:r>
+            <a:endParaRPr lang="en-US" sz="2800" dirty="0"/>
+          </a:p>
+        </p:txBody>
+      </p:sp>
+      <p:sp>
+        <p:nvSpPr>
+          <p:cNvPr id="9" name="Text 7"/>
+          <p:cNvSpPr/>
+          <p:nvPr/>
+        </p:nvSpPr>
+        <p:spPr>
+          <a:xfrm>
+            <a:off x="3489960" y="1828800"/>
+            <a:ext cx="2346960" cy="365760"/>
+          </a:xfrm>
+          <a:prstGeom prst="rect">
+            <a:avLst/>
+          </a:prstGeom>
+          <a:noFill/>
+          <a:ln/>
+        </p:spPr>
+        <p:txBody>
+          <a:bodyPr wrap="square" rtlCol="0" anchor="ctr"/>
+          <a:lstStyle/>
+          <a:p>
+            <a:pPr algn="ctr" indent="0" marL="0">
+              <a:buNone/>
+            </a:pPr>
+            <a:r>
+              <a:rPr lang="en-US" sz="1300" b="1" dirty="0">
+                <a:solidFill>
+                  <a:srgbClr val="F97316"/>
                 </a:solidFill>
                 <a:latin typeface="Calibri" pitchFamily="34" charset="0"/>
                 <a:ea typeface="Calibri" pitchFamily="34" charset="-122"/>
                 <a:cs typeface="Calibri" pitchFamily="34" charset="-120"/>
               </a:rPr>
-              <a:t>P3 : Mini-jeu (simulateurs interactifs LinkedList + HashMap)</a:t>
-            </a:r>
-            <a:endParaRPr lang="en-US" sz="1500" dirty="0"/>
-          </a:p>
-          <a:p>
-            <a:pPr marL="342900" indent="-342900">
-              <a:buSzPct val="100000"/>
-              <a:buChar char="•"/>
-            </a:pPr>
-            <a:r>
-              <a:rPr lang="en-US" sz="1200" dirty="0">
-                <a:solidFill>
-                  <a:srgbClr val="E2E8F0"/>
+              <a:t>HashMap</a:t>
+            </a:r>
+            <a:endParaRPr lang="en-US" sz="1300" dirty="0"/>
+          </a:p>
+        </p:txBody>
+      </p:sp>
+      <p:sp>
+        <p:nvSpPr>
+          <p:cNvPr id="10" name="Text 8"/>
+          <p:cNvSpPr/>
+          <p:nvPr/>
+        </p:nvSpPr>
+        <p:spPr>
+          <a:xfrm>
+            <a:off x="3489960" y="2286000"/>
+            <a:ext cx="2346960" cy="1828800"/>
+          </a:xfrm>
+          <a:prstGeom prst="rect">
+            <a:avLst/>
+          </a:prstGeom>
+          <a:noFill/>
+          <a:ln/>
+        </p:spPr>
+        <p:txBody>
+          <a:bodyPr wrap="square" rtlCol="0" anchor="t"/>
+          <a:lstStyle/>
+          <a:p>
+            <a:pPr algn="ctr" indent="0" marL="0">
+              <a:buNone/>
+            </a:pPr>
+            <a:r>
+              <a:rPr lang="en-US" sz="1100" dirty="0">
+                <a:solidFill>
+                  <a:srgbClr val="94A3B8"/>
                 </a:solidFill>
                 <a:latin typeface="Calibri" pitchFamily="34" charset="0"/>
                 <a:ea typeface="Calibri" pitchFamily="34" charset="-122"/>
                 <a:cs typeface="Calibri" pitchFamily="34" charset="-120"/>
               </a:rPr>
-              <a:t>P4 : Exercice Java complet — gestion contacts avec les deux structures</a:t>
-            </a:r>
-            <a:endParaRPr lang="en-US" sz="1500" dirty="0"/>
-          </a:p>
-          <a:p>
-            <a:pPr indent="0" marL="0">
-              <a:buNone/>
-            </a:pPr>
-            <a:endParaRPr lang="en-US" sz="1500" dirty="0"/>
-          </a:p>
-          <a:p>
-            <a:pPr indent="0" marL="0">
-              <a:buNone/>
-            </a:pPr>
-            <a:r>
-              <a:rPr lang="en-US" sz="1400" b="1" dirty="0">
+              <a:t>Hash → index, accès O(1) moyen</a:t>
+            </a:r>
+            <a:endParaRPr lang="en-US" sz="1100" dirty="0"/>
+          </a:p>
+        </p:txBody>
+      </p:sp>
+      <p:sp>
+        <p:nvSpPr>
+          <p:cNvPr id="11" name="Shape 9"/>
+          <p:cNvSpPr/>
+          <p:nvPr/>
+        </p:nvSpPr>
+        <p:spPr>
+          <a:xfrm>
+            <a:off x="6156960" y="1097280"/>
+            <a:ext cx="2621280" cy="3200400"/>
+          </a:xfrm>
+          <a:prstGeom prst="roundRect">
+            <a:avLst>
+              <a:gd name="adj" fmla="val 3488"/>
+            </a:avLst>
+          </a:prstGeom>
+          <a:solidFill>
+            <a:srgbClr val="2D1A00"/>
+          </a:solidFill>
+          <a:ln/>
+        </p:spPr>
+      </p:sp>
+      <p:sp>
+        <p:nvSpPr>
+          <p:cNvPr id="12" name="Text 10"/>
+          <p:cNvSpPr/>
+          <p:nvPr/>
+        </p:nvSpPr>
+        <p:spPr>
+          <a:xfrm>
+            <a:off x="6156960" y="1280160"/>
+            <a:ext cx="2621280" cy="457200"/>
+          </a:xfrm>
+          <a:prstGeom prst="rect">
+            <a:avLst/>
+          </a:prstGeom>
+          <a:noFill/>
+          <a:ln/>
+        </p:spPr>
+        <p:txBody>
+          <a:bodyPr wrap="square" rtlCol="0" anchor="ctr"/>
+          <a:lstStyle/>
+          <a:p>
+            <a:pPr algn="ctr" indent="0" marL="0">
+              <a:buNone/>
+            </a:pPr>
+            <a:r>
+              <a:rPr lang="en-US" sz="2800" dirty="0">
+                <a:solidFill>
+                  <a:srgbClr val="000000"/>
+                </a:solidFill>
+              </a:rPr>
+              <a:t>📋</a:t>
+            </a:r>
+            <a:endParaRPr lang="en-US" sz="2800" dirty="0"/>
+          </a:p>
+        </p:txBody>
+      </p:sp>
+      <p:sp>
+        <p:nvSpPr>
+          <p:cNvPr id="13" name="Text 11"/>
+          <p:cNvSpPr/>
+          <p:nvPr/>
+        </p:nvSpPr>
+        <p:spPr>
+          <a:xfrm>
+            <a:off x="6294120" y="1828800"/>
+            <a:ext cx="2346960" cy="365760"/>
+          </a:xfrm>
+          <a:prstGeom prst="rect">
+            <a:avLst/>
+          </a:prstGeom>
+          <a:noFill/>
+          <a:ln/>
+        </p:spPr>
+        <p:txBody>
+          <a:bodyPr wrap="square" rtlCol="0" anchor="ctr"/>
+          <a:lstStyle/>
+          <a:p>
+            <a:pPr algn="ctr" indent="0" marL="0">
+              <a:buNone/>
+            </a:pPr>
+            <a:r>
+              <a:rPr lang="en-US" sz="1300" b="1" dirty="0">
                 <a:solidFill>
                   <a:srgbClr val="F97316"/>
                 </a:solidFill>
@@ -3292,81 +2899,48 @@
                 <a:ea typeface="Calibri" pitchFamily="34" charset="-122"/>
                 <a:cs typeface="Calibri" pitchFamily="34" charset="-120"/>
               </a:rPr>
-              <a:t>Critère P4 — l'étudiant doit :</a:t>
-            </a:r>
-            <a:endParaRPr lang="en-US" sz="1500" dirty="0"/>
-          </a:p>
-          <a:p>
-            <a:pPr marL="342900" indent="-342900">
-              <a:buSzPct val="100000"/>
-              <a:buChar char="•"/>
-            </a:pPr>
-            <a:r>
-              <a:rPr lang="en-US" sz="1200" dirty="0">
-                <a:solidFill>
-                  <a:srgbClr val="E2E8F0"/>
+              <a:t>ArrayList</a:t>
+            </a:r>
+            <a:endParaRPr lang="en-US" sz="1300" dirty="0"/>
+          </a:p>
+        </p:txBody>
+      </p:sp>
+      <p:sp>
+        <p:nvSpPr>
+          <p:cNvPr id="14" name="Text 12"/>
+          <p:cNvSpPr/>
+          <p:nvPr/>
+        </p:nvSpPr>
+        <p:spPr>
+          <a:xfrm>
+            <a:off x="6294120" y="2286000"/>
+            <a:ext cx="2346960" cy="1828800"/>
+          </a:xfrm>
+          <a:prstGeom prst="rect">
+            <a:avLst/>
+          </a:prstGeom>
+          <a:noFill/>
+          <a:ln/>
+        </p:spPr>
+        <p:txBody>
+          <a:bodyPr wrap="square" rtlCol="0" anchor="t"/>
+          <a:lstStyle/>
+          <a:p>
+            <a:pPr algn="ctr" indent="0" marL="0">
+              <a:buNone/>
+            </a:pPr>
+            <a:r>
+              <a:rPr lang="en-US" sz="1100" dirty="0">
+                <a:solidFill>
+                  <a:srgbClr val="94A3B8"/>
                 </a:solidFill>
                 <a:latin typeface="Calibri" pitchFamily="34" charset="0"/>
                 <a:ea typeface="Calibri" pitchFamily="34" charset="-122"/>
                 <a:cs typeface="Calibri" pitchFamily="34" charset="-120"/>
               </a:rPr>
-              <a:t>Implémenter un ADT complexe (LinkedList ou HashMap) en Java</a:t>
-            </a:r>
-            <a:endParaRPr lang="en-US" sz="1500" dirty="0"/>
-          </a:p>
-          <a:p>
-            <a:pPr marL="342900" indent="-342900">
-              <a:buSzPct val="100000"/>
-              <a:buChar char="•"/>
-            </a:pPr>
-            <a:r>
-              <a:rPr lang="en-US" sz="1200" dirty="0">
-                <a:solidFill>
-                  <a:srgbClr val="E2E8F0"/>
-                </a:solidFill>
-                <a:latin typeface="Calibri" pitchFamily="34" charset="0"/>
-                <a:ea typeface="Calibri" pitchFamily="34" charset="-122"/>
-                <a:cs typeface="Calibri" pitchFamily="34" charset="-120"/>
-              </a:rPr>
-              <a:t>Le code doit résoudre un problème concret (contexte entreprise)</a:t>
-            </a:r>
-            <a:endParaRPr lang="en-US" sz="1500" dirty="0"/>
-          </a:p>
-          <a:p>
-            <a:pPr marL="342900" indent="-342900">
-              <a:buSzPct val="100000"/>
-              <a:buChar char="•"/>
-            </a:pPr>
-            <a:r>
-              <a:rPr lang="en-US" sz="1200" dirty="0">
-                <a:solidFill>
-                  <a:srgbClr val="E2E8F0"/>
-                </a:solidFill>
-                <a:latin typeface="Calibri" pitchFamily="34" charset="0"/>
-                <a:ea typeface="Calibri" pitchFamily="34" charset="-122"/>
-                <a:cs typeface="Calibri" pitchFamily="34" charset="-120"/>
-              </a:rPr>
-              <a:t>Montrer les opérations CRUD avec la structure choisie</a:t>
-            </a:r>
-            <a:endParaRPr lang="en-US" sz="1500" dirty="0"/>
-          </a:p>
-          <a:p>
-            <a:pPr marL="342900" indent="-342900">
-              <a:buSzPct val="100000"/>
-              <a:buChar char="•"/>
-            </a:pPr>
-            <a:r>
-              <a:rPr lang="en-US" sz="1200" dirty="0">
-                <a:solidFill>
-                  <a:srgbClr val="E2E8F0"/>
-                </a:solidFill>
-                <a:latin typeface="Calibri" pitchFamily="34" charset="0"/>
-                <a:ea typeface="Calibri" pitchFamily="34" charset="-122"/>
-                <a:cs typeface="Calibri" pitchFamily="34" charset="-120"/>
-              </a:rPr>
-              <a:t>Le code doit être commenté et fonctionnel</a:t>
-            </a:r>
-            <a:endParaRPr lang="en-US" sz="1500" dirty="0"/>
+              <a:t>Tableau dynamique, accès O(1), insertion O(n)</a:t>
+            </a:r>
+            <a:endParaRPr lang="en-US" sz="1100" dirty="0"/>
           </a:p>
         </p:txBody>
       </p:sp>
